--- a/modulo-02/02.03 - Processando Campos de Caracteres/02.03_Processando_campos_de_caracteres.pptx
+++ b/modulo-02/02.03 - Processando Campos de Caracteres/02.03_Processando_campos_de_caracteres.pptx
@@ -1550,7 +1550,7 @@
                   <a:srgbClr val="8FA3C7"/>
                 </a:solidFill>
               </a:rPr>
-              <a:t>ABAP Moderno · Módulo 04 — Programação ABAP Intermediária  ·  Aula 3 de 9 — Campos de caracteres</a:t>
+              <a:t>ABAP Moderno · Módulo 02 — Programação ABAP Intermediária  ·  Aula 3 de 9 — Campos de caracteres</a:t>
             </a:r>
             <a:endParaRPr lang="en-US" sz="900" dirty="0"/>
           </a:p>
@@ -1696,7 +1696,7 @@
                   <a:srgbClr val="556B82"/>
                 </a:solidFill>
               </a:rPr>
-              <a:t>ABAP Moderno · Módulo 04 — Programação ABAP Intermediária  ·  Aula 3 de 9 — Campos de caracteres</a:t>
+              <a:t>ABAP Moderno · Módulo 02 — Programação ABAP Intermediária  ·  Aula 3 de 9 — Campos de caracteres</a:t>
             </a:r>
             <a:endParaRPr lang="en-US" sz="900" dirty="0"/>
           </a:p>
@@ -2127,7 +2127,7 @@
                   <a:srgbClr val="89D1FF"/>
                 </a:solidFill>
               </a:rPr>
-              <a:t>MÓDULO 04 · AULA 03 DE 09</a:t>
+              <a:t>MÓDULO 02 · AULA 03 DE 09</a:t>
             </a:r>
             <a:endParaRPr lang="en-US" sz="1400" dirty="0"/>
           </a:p>
@@ -2513,7 +2513,7 @@
                   <a:srgbClr val="8FA3C7"/>
                 </a:solidFill>
               </a:rPr>
-              <a:t>ABAP Moderno · Módulo 04 — Programação ABAP Intermediária · Design System SAP Horizon</a:t>
+              <a:t>ABAP Moderno · Módulo 02 — Programação ABAP Intermediária · Design System SAP Horizon</a:t>
             </a:r>
             <a:endParaRPr lang="en-US" sz="1100" dirty="0"/>
           </a:p>
@@ -2763,7 +2763,7 @@
                   <a:srgbClr val="FFFFFF"/>
                 </a:solidFill>
               </a:rPr>
-              <a:t>zcl_04_texts.clas.abap</a:t>
+              <a:t>zcl_02_texts.clas.abap</a:t>
             </a:r>
             <a:endParaRPr lang="en-US" sz="950" dirty="0"/>
           </a:p>
@@ -2799,7 +2799,7 @@
                   <a:srgbClr val="9DA5B4"/>
                 </a:solidFill>
               </a:rPr>
-              <a:t>ZS4D401_## › ZCL_04_TEXTS › main</a:t>
+              <a:t>ZS4D401_## › ZCL_02_TEXTS › main</a:t>
             </a:r>
             <a:endParaRPr lang="en-US" sz="850" dirty="0"/>
           </a:p>
@@ -3118,7 +3118,7 @@
                 <a:ea typeface="Courier New" pitchFamily="34" charset="-122"/>
                 <a:cs typeface="Courier New" pitchFamily="34" charset="-120"/>
               </a:rPr>
-              <a:t>'Voos encontrados:'</a:t>
+              <a:t>'Pedidos encontrados:'</a:t>
             </a:r>
             <a:r>
               <a:rPr lang="en-US" sz="1050" dirty="0">
@@ -3434,7 +3434,7 @@
                 <a:ea typeface="Courier New" pitchFamily="34" charset="-122"/>
                 <a:cs typeface="Courier New" pitchFamily="34" charset="-120"/>
               </a:rPr>
-              <a:t>'Voos encontrados:'</a:t>
+              <a:t>'Pedidos encontrados:'</a:t>
             </a:r>
             <a:r>
               <a:rPr lang="en-US" sz="1050" dirty="0">
@@ -4248,7 +4248,7 @@
                   <a:srgbClr val="FFFFFF"/>
                 </a:solidFill>
               </a:rPr>
-              <a:t>O que aprendemos na aula 04.03</a:t>
+              <a:t>O que aprendemos na aula 02.03</a:t>
             </a:r>
             <a:endParaRPr lang="en-US" sz="3200" dirty="0"/>
           </a:p>
@@ -4998,7 +4998,7 @@
                   <a:srgbClr val="89D1FF"/>
                 </a:solidFill>
               </a:rPr>
-              <a:t>Próxima aula · 04.04  </a:t>
+              <a:t>Próxima aula · 02.04  </a:t>
             </a:r>
             <a:r>
               <a:rPr lang="en-US" sz="1500" dirty="0">
@@ -5076,7 +5076,7 @@
         </p:blipFill>
         <p:spPr>
           <a:xfrm>
-            <a:off x="6355080" y="2926080"/>
+            <a:off x="822960" y="2926080"/>
             <a:ext cx="256032" cy="256032"/>
           </a:xfrm>
           <a:prstGeom prst="rect">
@@ -5100,7 +5100,7 @@
         </p:blipFill>
         <p:spPr>
           <a:xfrm>
-            <a:off x="822960" y="2926080"/>
+            <a:off x="6355080" y="2926080"/>
             <a:ext cx="256032" cy="256032"/>
           </a:xfrm>
           <a:prstGeom prst="rect">
@@ -5275,7 +5275,7 @@
                   <a:srgbClr val="1D2D3E"/>
                 </a:solidFill>
               </a:rPr>
-              <a:t>Módulo 04 em 9 aulas: ABAP intermediário</a:t>
+              <a:t>Módulo 02 em 9 aulas: ABAP intermediário</a:t>
             </a:r>
             <a:endParaRPr lang="en-US" sz="2800" dirty="0"/>
           </a:p>
@@ -6879,7 +6879,7 @@
         </p:blipFill>
         <p:spPr>
           <a:xfrm>
-            <a:off x="4328038" y="1847088"/>
+            <a:off x="6583497" y="1847088"/>
             <a:ext cx="347472" cy="347472"/>
           </a:xfrm>
           <a:prstGeom prst="rect">
@@ -6927,7 +6927,7 @@
         </p:blipFill>
         <p:spPr>
           <a:xfrm>
-            <a:off x="6583497" y="1847088"/>
+            <a:off x="4328038" y="1847088"/>
             <a:ext cx="347472" cy="347472"/>
           </a:xfrm>
           <a:prstGeom prst="rect">
@@ -6975,7 +6975,7 @@
         </p:blipFill>
         <p:spPr>
           <a:xfrm>
-            <a:off x="4328038" y="3858768"/>
+            <a:off x="11094415" y="1847088"/>
             <a:ext cx="347472" cy="347472"/>
           </a:xfrm>
           <a:prstGeom prst="rect">
@@ -7023,7 +7023,7 @@
         </p:blipFill>
         <p:spPr>
           <a:xfrm>
-            <a:off x="11094415" y="1847088"/>
+            <a:off x="4328038" y="3858768"/>
             <a:ext cx="347472" cy="347472"/>
           </a:xfrm>
           <a:prstGeom prst="rect">
@@ -7071,8 +7071,8 @@
         </p:blipFill>
         <p:spPr>
           <a:xfrm>
-            <a:off x="8838956" y="3858768"/>
-            <a:ext cx="347472" cy="347472"/>
+            <a:off x="749808" y="5751576"/>
+            <a:ext cx="310896" cy="310896"/>
           </a:xfrm>
           <a:prstGeom prst="rect">
             <a:avLst/>
@@ -7095,8 +7095,8 @@
         </p:blipFill>
         <p:spPr>
           <a:xfrm>
-            <a:off x="749808" y="5751576"/>
-            <a:ext cx="310896" cy="310896"/>
+            <a:off x="8838956" y="3858768"/>
+            <a:ext cx="347472" cy="347472"/>
           </a:xfrm>
           <a:prstGeom prst="rect">
             <a:avLst/>
@@ -8034,7 +8034,7 @@
                   <a:srgbClr val="89D1FF"/>
                 </a:solidFill>
               </a:rPr>
-              <a:t>AULA 04.03 · SEÇÃO 1</a:t>
+              <a:t>AULA 02.03 · SEÇÃO 1</a:t>
             </a:r>
             <a:endParaRPr lang="en-US" sz="1300" dirty="0"/>
           </a:p>
@@ -9559,7 +9559,7 @@
                   <a:srgbClr val="FFFFFF"/>
                 </a:solidFill>
               </a:rPr>
-              <a:t>zcl_04_text.clas.abap</a:t>
+              <a:t>zcl_02_text.clas.abap</a:t>
             </a:r>
             <a:endParaRPr lang="en-US" sz="950" dirty="0"/>
           </a:p>
@@ -9595,7 +9595,7 @@
                   <a:srgbClr val="9DA5B4"/>
                 </a:solidFill>
               </a:rPr>
-              <a:t>ZS4D401_## › ZCL_04_TEXT › main</a:t>
+              <a:t>ZS4D401_## › ZCL_02_TEXT › main</a:t>
             </a:r>
             <a:endParaRPr lang="en-US" sz="850" dirty="0"/>
           </a:p>
@@ -13282,7 +13282,7 @@
                   <a:srgbClr val="89D1FF"/>
                 </a:solidFill>
               </a:rPr>
-              <a:t>AULA 04.03 · SEÇÃO 2</a:t>
+              <a:t>AULA 02.03 · SEÇÃO 2</a:t>
             </a:r>
             <a:endParaRPr lang="en-US" sz="1300" dirty="0"/>
           </a:p>
@@ -13843,7 +13843,7 @@
         <p:spPr>
           <a:xfrm>
             <a:off x="640080" y="1700784"/>
-            <a:ext cx="2075688" cy="292608"/>
+            <a:ext cx="1997964" cy="292608"/>
           </a:xfrm>
           <a:prstGeom prst="rect">
             <a:avLst/>
@@ -13863,7 +13863,7 @@
         <p:spPr>
           <a:xfrm>
             <a:off x="640080" y="1700784"/>
-            <a:ext cx="2075688" cy="27432"/>
+            <a:ext cx="1997964" cy="27432"/>
           </a:xfrm>
           <a:prstGeom prst="rect">
             <a:avLst/>
@@ -13883,7 +13883,7 @@
         <p:spPr>
           <a:xfrm>
             <a:off x="731520" y="1719072"/>
-            <a:ext cx="1892808" cy="274320"/>
+            <a:ext cx="1815084" cy="274320"/>
           </a:xfrm>
           <a:prstGeom prst="rect">
             <a:avLst/>
@@ -13904,7 +13904,7 @@
                   <a:srgbClr val="FFFFFF"/>
                 </a:solidFill>
               </a:rPr>
-              <a:t>zcl_04_regex.clas.abap</a:t>
+              <a:t>zcl_pc_util.clas.abap</a:t>
             </a:r>
             <a:endParaRPr lang="en-US" sz="950" dirty="0"/>
           </a:p>
@@ -13940,7 +13940,7 @@
                   <a:srgbClr val="9DA5B4"/>
                 </a:solidFill>
               </a:rPr>
-              <a:t>ZS4D401_## › ZCL_04_REGEX › main</a:t>
+              <a:t>ZAVBS_PC_COMMON › ZCL_PC_UTIL e ZCL_PC_VIACEP (trechos)</a:t>
             </a:r>
             <a:endParaRPr lang="en-US" sz="850" dirty="0"/>
           </a:p>
@@ -13974,7 +13974,7 @@
               <a:buNone/>
             </a:pPr>
             <a:r>
-              <a:rPr lang="en-US" sz="1050" dirty="0">
+              <a:rPr lang="en-US" sz="950" dirty="0">
                 <a:solidFill>
                   <a:srgbClr val="6E7681"/>
                 </a:solidFill>
@@ -13984,7 +13984,7 @@
               </a:rPr>
               <a:t>1</a:t>
             </a:r>
-            <a:endParaRPr lang="en-US" sz="1050" dirty="0"/>
+            <a:endParaRPr lang="en-US" sz="950" dirty="0"/>
           </a:p>
           <a:p>
             <a:pPr algn="r" indent="0" marL="0">
@@ -13994,7 +13994,7 @@
               <a:buNone/>
             </a:pPr>
             <a:r>
-              <a:rPr lang="en-US" sz="1050" dirty="0">
+              <a:rPr lang="en-US" sz="950" dirty="0">
                 <a:solidFill>
                   <a:srgbClr val="6E7681"/>
                 </a:solidFill>
@@ -14004,7 +14004,7 @@
               </a:rPr>
               <a:t>2</a:t>
             </a:r>
-            <a:endParaRPr lang="en-US" sz="1050" dirty="0"/>
+            <a:endParaRPr lang="en-US" sz="950" dirty="0"/>
           </a:p>
           <a:p>
             <a:pPr algn="r" indent="0" marL="0">
@@ -14014,7 +14014,7 @@
               <a:buNone/>
             </a:pPr>
             <a:r>
-              <a:rPr lang="en-US" sz="1050" dirty="0">
+              <a:rPr lang="en-US" sz="950" dirty="0">
                 <a:solidFill>
                   <a:srgbClr val="6E7681"/>
                 </a:solidFill>
@@ -14024,7 +14024,7 @@
               </a:rPr>
               <a:t>3</a:t>
             </a:r>
-            <a:endParaRPr lang="en-US" sz="1050" dirty="0"/>
+            <a:endParaRPr lang="en-US" sz="950" dirty="0"/>
           </a:p>
           <a:p>
             <a:pPr algn="r" indent="0" marL="0">
@@ -14034,7 +14034,7 @@
               <a:buNone/>
             </a:pPr>
             <a:r>
-              <a:rPr lang="en-US" sz="1050" dirty="0">
+              <a:rPr lang="en-US" sz="950" dirty="0">
                 <a:solidFill>
                   <a:srgbClr val="6E7681"/>
                 </a:solidFill>
@@ -14044,7 +14044,7 @@
               </a:rPr>
               <a:t>4</a:t>
             </a:r>
-            <a:endParaRPr lang="en-US" sz="1050" dirty="0"/>
+            <a:endParaRPr lang="en-US" sz="950" dirty="0"/>
           </a:p>
           <a:p>
             <a:pPr algn="r" indent="0" marL="0">
@@ -14054,7 +14054,7 @@
               <a:buNone/>
             </a:pPr>
             <a:r>
-              <a:rPr lang="en-US" sz="1050" dirty="0">
+              <a:rPr lang="en-US" sz="950" dirty="0">
                 <a:solidFill>
                   <a:srgbClr val="6E7681"/>
                 </a:solidFill>
@@ -14064,7 +14064,7 @@
               </a:rPr>
               <a:t>5</a:t>
             </a:r>
-            <a:endParaRPr lang="en-US" sz="1050" dirty="0"/>
+            <a:endParaRPr lang="en-US" sz="950" dirty="0"/>
           </a:p>
           <a:p>
             <a:pPr algn="r" indent="0" marL="0">
@@ -14074,7 +14074,7 @@
               <a:buNone/>
             </a:pPr>
             <a:r>
-              <a:rPr lang="en-US" sz="1050" dirty="0">
+              <a:rPr lang="en-US" sz="950" dirty="0">
                 <a:solidFill>
                   <a:srgbClr val="6E7681"/>
                 </a:solidFill>
@@ -14084,7 +14084,7 @@
               </a:rPr>
               <a:t>6</a:t>
             </a:r>
-            <a:endParaRPr lang="en-US" sz="1050" dirty="0"/>
+            <a:endParaRPr lang="en-US" sz="950" dirty="0"/>
           </a:p>
           <a:p>
             <a:pPr algn="r" indent="0" marL="0">
@@ -14094,7 +14094,7 @@
               <a:buNone/>
             </a:pPr>
             <a:r>
-              <a:rPr lang="en-US" sz="1050" dirty="0">
+              <a:rPr lang="en-US" sz="950" dirty="0">
                 <a:solidFill>
                   <a:srgbClr val="6E7681"/>
                 </a:solidFill>
@@ -14104,7 +14104,7 @@
               </a:rPr>
               <a:t>7</a:t>
             </a:r>
-            <a:endParaRPr lang="en-US" sz="1050" dirty="0"/>
+            <a:endParaRPr lang="en-US" sz="950" dirty="0"/>
           </a:p>
           <a:p>
             <a:pPr algn="r" indent="0" marL="0">
@@ -14114,7 +14114,7 @@
               <a:buNone/>
             </a:pPr>
             <a:r>
-              <a:rPr lang="en-US" sz="1050" dirty="0">
+              <a:rPr lang="en-US" sz="950" dirty="0">
                 <a:solidFill>
                   <a:srgbClr val="6E7681"/>
                 </a:solidFill>
@@ -14124,7 +14124,7 @@
               </a:rPr>
               <a:t>8</a:t>
             </a:r>
-            <a:endParaRPr lang="en-US" sz="1050" dirty="0"/>
+            <a:endParaRPr lang="en-US" sz="950" dirty="0"/>
           </a:p>
           <a:p>
             <a:pPr algn="r" indent="0" marL="0">
@@ -14134,7 +14134,7 @@
               <a:buNone/>
             </a:pPr>
             <a:r>
-              <a:rPr lang="en-US" sz="1050" dirty="0">
+              <a:rPr lang="en-US" sz="950" dirty="0">
                 <a:solidFill>
                   <a:srgbClr val="6E7681"/>
                 </a:solidFill>
@@ -14144,7 +14144,7 @@
               </a:rPr>
               <a:t>9</a:t>
             </a:r>
-            <a:endParaRPr lang="en-US" sz="1050" dirty="0"/>
+            <a:endParaRPr lang="en-US" sz="950" dirty="0"/>
           </a:p>
           <a:p>
             <a:pPr algn="r" indent="0" marL="0">
@@ -14154,7 +14154,7 @@
               <a:buNone/>
             </a:pPr>
             <a:r>
-              <a:rPr lang="en-US" sz="1050" dirty="0">
+              <a:rPr lang="en-US" sz="950" dirty="0">
                 <a:solidFill>
                   <a:srgbClr val="6E7681"/>
                 </a:solidFill>
@@ -14164,7 +14164,7 @@
               </a:rPr>
               <a:t>10</a:t>
             </a:r>
-            <a:endParaRPr lang="en-US" sz="1050" dirty="0"/>
+            <a:endParaRPr lang="en-US" sz="950" dirty="0"/>
           </a:p>
           <a:p>
             <a:pPr algn="r" indent="0" marL="0">
@@ -14174,7 +14174,7 @@
               <a:buNone/>
             </a:pPr>
             <a:r>
-              <a:rPr lang="en-US" sz="1050" dirty="0">
+              <a:rPr lang="en-US" sz="950" dirty="0">
                 <a:solidFill>
                   <a:srgbClr val="6E7681"/>
                 </a:solidFill>
@@ -14184,7 +14184,7 @@
               </a:rPr>
               <a:t>11</a:t>
             </a:r>
-            <a:endParaRPr lang="en-US" sz="1050" dirty="0"/>
+            <a:endParaRPr lang="en-US" sz="950" dirty="0"/>
           </a:p>
           <a:p>
             <a:pPr algn="r" indent="0" marL="0">
@@ -14194,7 +14194,7 @@
               <a:buNone/>
             </a:pPr>
             <a:r>
-              <a:rPr lang="en-US" sz="1050" dirty="0">
+              <a:rPr lang="en-US" sz="950" dirty="0">
                 <a:solidFill>
                   <a:srgbClr val="6E7681"/>
                 </a:solidFill>
@@ -14204,7 +14204,7 @@
               </a:rPr>
               <a:t>12</a:t>
             </a:r>
-            <a:endParaRPr lang="en-US" sz="1050" dirty="0"/>
+            <a:endParaRPr lang="en-US" sz="950" dirty="0"/>
           </a:p>
           <a:p>
             <a:pPr algn="r" indent="0" marL="0">
@@ -14214,7 +14214,7 @@
               <a:buNone/>
             </a:pPr>
             <a:r>
-              <a:rPr lang="en-US" sz="1050" dirty="0">
+              <a:rPr lang="en-US" sz="950" dirty="0">
                 <a:solidFill>
                   <a:srgbClr val="6E7681"/>
                 </a:solidFill>
@@ -14224,7 +14224,27 @@
               </a:rPr>
               <a:t>13</a:t>
             </a:r>
-            <a:endParaRPr lang="en-US" sz="1050" dirty="0"/>
+            <a:endParaRPr lang="en-US" sz="950" dirty="0"/>
+          </a:p>
+          <a:p>
+            <a:pPr algn="r" indent="0" marL="0">
+              <a:lnSpc>
+                <a:spcPct val="105000"/>
+              </a:lnSpc>
+              <a:buNone/>
+            </a:pPr>
+            <a:r>
+              <a:rPr lang="en-US" sz="950" dirty="0">
+                <a:solidFill>
+                  <a:srgbClr val="6E7681"/>
+                </a:solidFill>
+                <a:latin typeface="Courier New" pitchFamily="34" charset="0"/>
+                <a:ea typeface="Courier New" pitchFamily="34" charset="-122"/>
+                <a:cs typeface="Courier New" pitchFamily="34" charset="-120"/>
+              </a:rPr>
+              <a:t>14</a:t>
+            </a:r>
+            <a:endParaRPr lang="en-US" sz="950" dirty="0"/>
           </a:p>
         </p:txBody>
       </p:sp>
@@ -14256,105 +14276,17 @@
               <a:buNone/>
             </a:pPr>
             <a:r>
-              <a:rPr lang="en-US" sz="1050" dirty="0">
-                <a:solidFill>
-                  <a:srgbClr val="569CD6"/>
-                </a:solidFill>
-                <a:latin typeface="Courier New" pitchFamily="34" charset="0"/>
-                <a:ea typeface="Courier New" pitchFamily="34" charset="-122"/>
-                <a:cs typeface="Courier New" pitchFamily="34" charset="-120"/>
-              </a:rPr>
-              <a:t>DATA</a:t>
-            </a:r>
-            <a:r>
-              <a:rPr lang="en-US" sz="1050" dirty="0">
-                <a:solidFill>
-                  <a:srgbClr val="CCCCCC"/>
-                </a:solidFill>
-                <a:latin typeface="Courier New" pitchFamily="34" charset="0"/>
-                <a:ea typeface="Courier New" pitchFamily="34" charset="-122"/>
-                <a:cs typeface="Courier New" pitchFamily="34" charset="-120"/>
-              </a:rPr>
-              <a:t>(</a:t>
-            </a:r>
-            <a:r>
-              <a:rPr lang="en-US" sz="1050" dirty="0">
-                <a:solidFill>
-                  <a:srgbClr val="CCCCCC"/>
-                </a:solidFill>
-                <a:latin typeface="Courier New" pitchFamily="34" charset="0"/>
-                <a:ea typeface="Courier New" pitchFamily="34" charset="-122"/>
-                <a:cs typeface="Courier New" pitchFamily="34" charset="-120"/>
-              </a:rPr>
-              <a:t>email</a:t>
-            </a:r>
-            <a:r>
-              <a:rPr lang="en-US" sz="1050" dirty="0">
-                <a:solidFill>
-                  <a:srgbClr val="CCCCCC"/>
-                </a:solidFill>
-                <a:latin typeface="Courier New" pitchFamily="34" charset="0"/>
-                <a:ea typeface="Courier New" pitchFamily="34" charset="-122"/>
-                <a:cs typeface="Courier New" pitchFamily="34" charset="-120"/>
-              </a:rPr>
-              <a:t>)</a:t>
-            </a:r>
-            <a:r>
-              <a:rPr lang="en-US" sz="1050" dirty="0">
-                <a:solidFill>
-                  <a:srgbClr val="CCCCCC"/>
-                </a:solidFill>
-                <a:latin typeface="Courier New" pitchFamily="34" charset="0"/>
-                <a:ea typeface="Courier New" pitchFamily="34" charset="-122"/>
-                <a:cs typeface="Courier New" pitchFamily="34" charset="-120"/>
-              </a:rPr>
-              <a:t> </a:t>
-            </a:r>
-            <a:r>
-              <a:rPr lang="en-US" sz="1050" dirty="0">
-                <a:solidFill>
-                  <a:srgbClr val="CCCCCC"/>
-                </a:solidFill>
-                <a:latin typeface="Courier New" pitchFamily="34" charset="0"/>
-                <a:ea typeface="Courier New" pitchFamily="34" charset="-122"/>
-                <a:cs typeface="Courier New" pitchFamily="34" charset="-120"/>
-              </a:rPr>
-              <a:t>=</a:t>
-            </a:r>
-            <a:r>
-              <a:rPr lang="en-US" sz="1050" dirty="0">
-                <a:solidFill>
-                  <a:srgbClr val="CCCCCC"/>
-                </a:solidFill>
-                <a:latin typeface="Courier New" pitchFamily="34" charset="0"/>
-                <a:ea typeface="Courier New" pitchFamily="34" charset="-122"/>
-                <a:cs typeface="Courier New" pitchFamily="34" charset="-120"/>
-              </a:rPr>
-              <a:t> </a:t>
-            </a:r>
-            <a:r>
-              <a:rPr lang="en-US" sz="1050" dirty="0">
-                <a:solidFill>
-                  <a:srgbClr val="CE9178"/>
-                </a:solidFill>
-                <a:latin typeface="Courier New" pitchFamily="34" charset="0"/>
-                <a:ea typeface="Courier New" pitchFamily="34" charset="-122"/>
-                <a:cs typeface="Courier New" pitchFamily="34" charset="-120"/>
-              </a:rPr>
-              <a:t>`ana.souza@example.com`</a:t>
-            </a:r>
-            <a:r>
-              <a:rPr lang="en-US" sz="1050" dirty="0">
-                <a:solidFill>
-                  <a:srgbClr val="CCCCCC"/>
-                </a:solidFill>
-                <a:latin typeface="Courier New" pitchFamily="34" charset="0"/>
-                <a:ea typeface="Courier New" pitchFamily="34" charset="-122"/>
-                <a:cs typeface="Courier New" pitchFamily="34" charset="-120"/>
-              </a:rPr>
-              <a:t>.</a:t>
-            </a:r>
-            <a:endParaRPr lang="en-US" sz="1050" dirty="0"/>
+              <a:rPr lang="en-US" sz="950" i="1" dirty="0">
+                <a:solidFill>
+                  <a:srgbClr val="6A9955"/>
+                </a:solidFill>
+                <a:latin typeface="Courier New" pitchFamily="34" charset="0"/>
+                <a:ea typeface="Courier New" pitchFamily="34" charset="-122"/>
+                <a:cs typeface="Courier New" pitchFamily="34" charset="-120"/>
+              </a:rPr>
+              <a:t>" validar_email: o texto inteiro precisa seguir o padrão</a:t>
+            </a:r>
+            <a:endParaRPr lang="en-US" sz="950" dirty="0"/>
           </a:p>
           <a:p>
             <a:pPr indent="0" marL="0">
@@ -14364,9 +14296,53 @@
               <a:buNone/>
             </a:pPr>
             <a:r>
-              <a:rPr lang="en-US" sz="1050" dirty="0">
-                <a:solidFill>
-                  <a:srgbClr val="000000"/>
+              <a:rPr lang="en-US" sz="950" dirty="0">
+                <a:solidFill>
+                  <a:srgbClr val="569CD6"/>
+                </a:solidFill>
+                <a:latin typeface="Courier New" pitchFamily="34" charset="0"/>
+                <a:ea typeface="Courier New" pitchFamily="34" charset="-122"/>
+                <a:cs typeface="Courier New" pitchFamily="34" charset="-120"/>
+              </a:rPr>
+              <a:t>DATA</a:t>
+            </a:r>
+            <a:r>
+              <a:rPr lang="en-US" sz="950" dirty="0">
+                <a:solidFill>
+                  <a:srgbClr val="CCCCCC"/>
+                </a:solidFill>
+                <a:latin typeface="Courier New" pitchFamily="34" charset="0"/>
+                <a:ea typeface="Courier New" pitchFamily="34" charset="-122"/>
+                <a:cs typeface="Courier New" pitchFamily="34" charset="-120"/>
+              </a:rPr>
+              <a:t>(</a:t>
+            </a:r>
+            <a:r>
+              <a:rPr lang="en-US" sz="950" dirty="0">
+                <a:solidFill>
+                  <a:srgbClr val="CCCCCC"/>
+                </a:solidFill>
+                <a:latin typeface="Courier New" pitchFamily="34" charset="0"/>
+                <a:ea typeface="Courier New" pitchFamily="34" charset="-122"/>
+                <a:cs typeface="Courier New" pitchFamily="34" charset="-120"/>
+              </a:rPr>
+              <a:t>lv_email</a:t>
+            </a:r>
+            <a:r>
+              <a:rPr lang="en-US" sz="950" dirty="0">
+                <a:solidFill>
+                  <a:srgbClr val="CCCCCC"/>
+                </a:solidFill>
+                <a:latin typeface="Courier New" pitchFamily="34" charset="0"/>
+                <a:ea typeface="Courier New" pitchFamily="34" charset="-122"/>
+                <a:cs typeface="Courier New" pitchFamily="34" charset="-120"/>
+              </a:rPr>
+              <a:t>)</a:t>
+            </a:r>
+            <a:r>
+              <a:rPr lang="en-US" sz="950" dirty="0">
+                <a:solidFill>
+                  <a:srgbClr val="CCCCCC"/>
                 </a:solidFill>
                 <a:latin typeface="Courier New" pitchFamily="34" charset="0"/>
                 <a:ea typeface="Courier New" pitchFamily="34" charset="-122"/>
@@ -14374,7 +14350,161 @@
               </a:rPr>
               <a:t> </a:t>
             </a:r>
-            <a:endParaRPr lang="en-US" sz="1050" dirty="0"/>
+            <a:r>
+              <a:rPr lang="en-US" sz="950" dirty="0">
+                <a:solidFill>
+                  <a:srgbClr val="CCCCCC"/>
+                </a:solidFill>
+                <a:latin typeface="Courier New" pitchFamily="34" charset="0"/>
+                <a:ea typeface="Courier New" pitchFamily="34" charset="-122"/>
+                <a:cs typeface="Courier New" pitchFamily="34" charset="-120"/>
+              </a:rPr>
+              <a:t>=</a:t>
+            </a:r>
+            <a:r>
+              <a:rPr lang="en-US" sz="950" dirty="0">
+                <a:solidFill>
+                  <a:srgbClr val="CCCCCC"/>
+                </a:solidFill>
+                <a:latin typeface="Courier New" pitchFamily="34" charset="0"/>
+                <a:ea typeface="Courier New" pitchFamily="34" charset="-122"/>
+                <a:cs typeface="Courier New" pitchFamily="34" charset="-120"/>
+              </a:rPr>
+              <a:t> </a:t>
+            </a:r>
+            <a:r>
+              <a:rPr lang="en-US" sz="950" dirty="0">
+                <a:solidFill>
+                  <a:srgbClr val="CCCCCC"/>
+                </a:solidFill>
+                <a:latin typeface="Courier New" pitchFamily="34" charset="0"/>
+                <a:ea typeface="Courier New" pitchFamily="34" charset="-122"/>
+                <a:cs typeface="Courier New" pitchFamily="34" charset="-120"/>
+              </a:rPr>
+              <a:t>condense</a:t>
+            </a:r>
+            <a:r>
+              <a:rPr lang="en-US" sz="950" dirty="0">
+                <a:solidFill>
+                  <a:srgbClr val="CCCCCC"/>
+                </a:solidFill>
+                <a:latin typeface="Courier New" pitchFamily="34" charset="0"/>
+                <a:ea typeface="Courier New" pitchFamily="34" charset="-122"/>
+                <a:cs typeface="Courier New" pitchFamily="34" charset="-120"/>
+              </a:rPr>
+              <a:t>(</a:t>
+            </a:r>
+            <a:r>
+              <a:rPr lang="en-US" sz="950" dirty="0">
+                <a:solidFill>
+                  <a:srgbClr val="CCCCCC"/>
+                </a:solidFill>
+                <a:latin typeface="Courier New" pitchFamily="34" charset="0"/>
+                <a:ea typeface="Courier New" pitchFamily="34" charset="-122"/>
+                <a:cs typeface="Courier New" pitchFamily="34" charset="-120"/>
+              </a:rPr>
+              <a:t> </a:t>
+            </a:r>
+            <a:r>
+              <a:rPr lang="en-US" sz="950" dirty="0">
+                <a:solidFill>
+                  <a:srgbClr val="CCCCCC"/>
+                </a:solidFill>
+                <a:latin typeface="Courier New" pitchFamily="34" charset="0"/>
+                <a:ea typeface="Courier New" pitchFamily="34" charset="-122"/>
+                <a:cs typeface="Courier New" pitchFamily="34" charset="-120"/>
+              </a:rPr>
+              <a:t>to_lower</a:t>
+            </a:r>
+            <a:r>
+              <a:rPr lang="en-US" sz="950" dirty="0">
+                <a:solidFill>
+                  <a:srgbClr val="CCCCCC"/>
+                </a:solidFill>
+                <a:latin typeface="Courier New" pitchFamily="34" charset="0"/>
+                <a:ea typeface="Courier New" pitchFamily="34" charset="-122"/>
+                <a:cs typeface="Courier New" pitchFamily="34" charset="-120"/>
+              </a:rPr>
+              <a:t>(</a:t>
+            </a:r>
+            <a:r>
+              <a:rPr lang="en-US" sz="950" dirty="0">
+                <a:solidFill>
+                  <a:srgbClr val="CCCCCC"/>
+                </a:solidFill>
+                <a:latin typeface="Courier New" pitchFamily="34" charset="0"/>
+                <a:ea typeface="Courier New" pitchFamily="34" charset="-122"/>
+                <a:cs typeface="Courier New" pitchFamily="34" charset="-120"/>
+              </a:rPr>
+              <a:t> </a:t>
+            </a:r>
+            <a:r>
+              <a:rPr lang="en-US" sz="950" dirty="0">
+                <a:solidFill>
+                  <a:srgbClr val="CCCCCC"/>
+                </a:solidFill>
+                <a:latin typeface="Courier New" pitchFamily="34" charset="0"/>
+                <a:ea typeface="Courier New" pitchFamily="34" charset="-122"/>
+                <a:cs typeface="Courier New" pitchFamily="34" charset="-120"/>
+              </a:rPr>
+              <a:t>iv_email</a:t>
+            </a:r>
+            <a:r>
+              <a:rPr lang="en-US" sz="950" dirty="0">
+                <a:solidFill>
+                  <a:srgbClr val="CCCCCC"/>
+                </a:solidFill>
+                <a:latin typeface="Courier New" pitchFamily="34" charset="0"/>
+                <a:ea typeface="Courier New" pitchFamily="34" charset="-122"/>
+                <a:cs typeface="Courier New" pitchFamily="34" charset="-120"/>
+              </a:rPr>
+              <a:t> </a:t>
+            </a:r>
+            <a:r>
+              <a:rPr lang="en-US" sz="950" dirty="0">
+                <a:solidFill>
+                  <a:srgbClr val="CCCCCC"/>
+                </a:solidFill>
+                <a:latin typeface="Courier New" pitchFamily="34" charset="0"/>
+                <a:ea typeface="Courier New" pitchFamily="34" charset="-122"/>
+                <a:cs typeface="Courier New" pitchFamily="34" charset="-120"/>
+              </a:rPr>
+              <a:t>)</a:t>
+            </a:r>
+            <a:r>
+              <a:rPr lang="en-US" sz="950" dirty="0">
+                <a:solidFill>
+                  <a:srgbClr val="CCCCCC"/>
+                </a:solidFill>
+                <a:latin typeface="Courier New" pitchFamily="34" charset="0"/>
+                <a:ea typeface="Courier New" pitchFamily="34" charset="-122"/>
+                <a:cs typeface="Courier New" pitchFamily="34" charset="-120"/>
+              </a:rPr>
+              <a:t> </a:t>
+            </a:r>
+            <a:r>
+              <a:rPr lang="en-US" sz="950" dirty="0">
+                <a:solidFill>
+                  <a:srgbClr val="CCCCCC"/>
+                </a:solidFill>
+                <a:latin typeface="Courier New" pitchFamily="34" charset="0"/>
+                <a:ea typeface="Courier New" pitchFamily="34" charset="-122"/>
+                <a:cs typeface="Courier New" pitchFamily="34" charset="-120"/>
+              </a:rPr>
+              <a:t>)</a:t>
+            </a:r>
+            <a:r>
+              <a:rPr lang="en-US" sz="950" dirty="0">
+                <a:solidFill>
+                  <a:srgbClr val="CCCCCC"/>
+                </a:solidFill>
+                <a:latin typeface="Courier New" pitchFamily="34" charset="0"/>
+                <a:ea typeface="Courier New" pitchFamily="34" charset="-122"/>
+                <a:cs typeface="Courier New" pitchFamily="34" charset="-120"/>
+              </a:rPr>
+              <a:t>.</a:t>
+            </a:r>
+            <a:endParaRPr lang="en-US" sz="950" dirty="0"/>
           </a:p>
           <a:p>
             <a:pPr indent="0" marL="0">
@@ -14384,18 +14514,18 @@
               <a:buNone/>
             </a:pPr>
             <a:r>
-              <a:rPr lang="en-US" sz="1050" dirty="0">
-                <a:solidFill>
-                  <a:srgbClr val="569CD6"/>
-                </a:solidFill>
-                <a:latin typeface="Courier New" pitchFamily="34" charset="0"/>
-                <a:ea typeface="Courier New" pitchFamily="34" charset="-122"/>
-                <a:cs typeface="Courier New" pitchFamily="34" charset="-120"/>
-              </a:rPr>
-              <a:t>IF</a:t>
-            </a:r>
-            <a:r>
-              <a:rPr lang="en-US" sz="1050" dirty="0">
+              <a:rPr lang="en-US" sz="950" dirty="0">
+                <a:solidFill>
+                  <a:srgbClr val="CCCCCC"/>
+                </a:solidFill>
+                <a:latin typeface="Courier New" pitchFamily="34" charset="0"/>
+                <a:ea typeface="Courier New" pitchFamily="34" charset="-122"/>
+                <a:cs typeface="Courier New" pitchFamily="34" charset="-120"/>
+              </a:rPr>
+              <a:t>rv_valido</a:t>
+            </a:r>
+            <a:r>
+              <a:rPr lang="en-US" sz="950" dirty="0">
                 <a:solidFill>
                   <a:srgbClr val="CCCCCC"/>
                 </a:solidFill>
@@ -14406,7 +14536,62 @@
               <a:t> </a:t>
             </a:r>
             <a:r>
-              <a:rPr lang="en-US" sz="1050" dirty="0">
+              <a:rPr lang="en-US" sz="950" dirty="0">
+                <a:solidFill>
+                  <a:srgbClr val="CCCCCC"/>
+                </a:solidFill>
+                <a:latin typeface="Courier New" pitchFamily="34" charset="0"/>
+                <a:ea typeface="Courier New" pitchFamily="34" charset="-122"/>
+                <a:cs typeface="Courier New" pitchFamily="34" charset="-120"/>
+              </a:rPr>
+              <a:t>=</a:t>
+            </a:r>
+            <a:r>
+              <a:rPr lang="en-US" sz="950" dirty="0">
+                <a:solidFill>
+                  <a:srgbClr val="CCCCCC"/>
+                </a:solidFill>
+                <a:latin typeface="Courier New" pitchFamily="34" charset="0"/>
+                <a:ea typeface="Courier New" pitchFamily="34" charset="-122"/>
+                <a:cs typeface="Courier New" pitchFamily="34" charset="-120"/>
+              </a:rPr>
+              <a:t> </a:t>
+            </a:r>
+            <a:r>
+              <a:rPr lang="en-US" sz="950" dirty="0">
+                <a:solidFill>
+                  <a:srgbClr val="CCCCCC"/>
+                </a:solidFill>
+                <a:latin typeface="Courier New" pitchFamily="34" charset="0"/>
+                <a:ea typeface="Courier New" pitchFamily="34" charset="-122"/>
+                <a:cs typeface="Courier New" pitchFamily="34" charset="-120"/>
+              </a:rPr>
+              <a:t>xsdbool</a:t>
+            </a:r>
+            <a:r>
+              <a:rPr lang="en-US" sz="950" dirty="0">
+                <a:solidFill>
+                  <a:srgbClr val="CCCCCC"/>
+                </a:solidFill>
+                <a:latin typeface="Courier New" pitchFamily="34" charset="0"/>
+                <a:ea typeface="Courier New" pitchFamily="34" charset="-122"/>
+                <a:cs typeface="Courier New" pitchFamily="34" charset="-120"/>
+              </a:rPr>
+              <a:t>(</a:t>
+            </a:r>
+            <a:r>
+              <a:rPr lang="en-US" sz="950" dirty="0">
+                <a:solidFill>
+                  <a:srgbClr val="CCCCCC"/>
+                </a:solidFill>
+                <a:latin typeface="Courier New" pitchFamily="34" charset="0"/>
+                <a:ea typeface="Courier New" pitchFamily="34" charset="-122"/>
+                <a:cs typeface="Courier New" pitchFamily="34" charset="-120"/>
+              </a:rPr>
+              <a:t> </a:t>
+            </a:r>
+            <a:r>
+              <a:rPr lang="en-US" sz="950" dirty="0">
                 <a:solidFill>
                   <a:srgbClr val="CCCCCC"/>
                 </a:solidFill>
@@ -14417,7 +14602,7 @@
               <a:t>matches</a:t>
             </a:r>
             <a:r>
-              <a:rPr lang="en-US" sz="1050" dirty="0">
+              <a:rPr lang="en-US" sz="950" dirty="0">
                 <a:solidFill>
                   <a:srgbClr val="CCCCCC"/>
                 </a:solidFill>
@@ -14428,7 +14613,7 @@
               <a:t>(</a:t>
             </a:r>
             <a:r>
-              <a:rPr lang="en-US" sz="1050" dirty="0">
+              <a:rPr lang="en-US" sz="950" dirty="0">
                 <a:solidFill>
                   <a:srgbClr val="CCCCCC"/>
                 </a:solidFill>
@@ -14439,7 +14624,7 @@
               <a:t> </a:t>
             </a:r>
             <a:r>
-              <a:rPr lang="en-US" sz="1050" dirty="0">
+              <a:rPr lang="en-US" sz="950" dirty="0">
                 <a:solidFill>
                   <a:srgbClr val="CCCCCC"/>
                 </a:solidFill>
@@ -14450,7 +14635,29 @@
               <a:t>val</a:t>
             </a:r>
             <a:r>
-              <a:rPr lang="en-US" sz="1050" dirty="0">
+              <a:rPr lang="en-US" sz="950" dirty="0">
+                <a:solidFill>
+                  <a:srgbClr val="CCCCCC"/>
+                </a:solidFill>
+                <a:latin typeface="Courier New" pitchFamily="34" charset="0"/>
+                <a:ea typeface="Courier New" pitchFamily="34" charset="-122"/>
+                <a:cs typeface="Courier New" pitchFamily="34" charset="-120"/>
+              </a:rPr>
+              <a:t>  </a:t>
+            </a:r>
+            <a:r>
+              <a:rPr lang="en-US" sz="950" dirty="0">
+                <a:solidFill>
+                  <a:srgbClr val="CCCCCC"/>
+                </a:solidFill>
+                <a:latin typeface="Courier New" pitchFamily="34" charset="0"/>
+                <a:ea typeface="Courier New" pitchFamily="34" charset="-122"/>
+                <a:cs typeface="Courier New" pitchFamily="34" charset="-120"/>
+              </a:rPr>
+              <a:t>=</a:t>
+            </a:r>
+            <a:r>
+              <a:rPr lang="en-US" sz="950" dirty="0">
                 <a:solidFill>
                   <a:srgbClr val="CCCCCC"/>
                 </a:solidFill>
@@ -14461,39 +14668,17 @@
               <a:t> </a:t>
             </a:r>
             <a:r>
-              <a:rPr lang="en-US" sz="1050" dirty="0">
-                <a:solidFill>
-                  <a:srgbClr val="CCCCCC"/>
-                </a:solidFill>
-                <a:latin typeface="Courier New" pitchFamily="34" charset="0"/>
-                <a:ea typeface="Courier New" pitchFamily="34" charset="-122"/>
-                <a:cs typeface="Courier New" pitchFamily="34" charset="-120"/>
-              </a:rPr>
-              <a:t>=</a:t>
-            </a:r>
-            <a:r>
-              <a:rPr lang="en-US" sz="1050" dirty="0">
-                <a:solidFill>
-                  <a:srgbClr val="CCCCCC"/>
-                </a:solidFill>
-                <a:latin typeface="Courier New" pitchFamily="34" charset="0"/>
-                <a:ea typeface="Courier New" pitchFamily="34" charset="-122"/>
-                <a:cs typeface="Courier New" pitchFamily="34" charset="-120"/>
-              </a:rPr>
-              <a:t> </a:t>
-            </a:r>
-            <a:r>
-              <a:rPr lang="en-US" sz="1050" dirty="0">
-                <a:solidFill>
-                  <a:srgbClr val="CCCCCC"/>
-                </a:solidFill>
-                <a:latin typeface="Courier New" pitchFamily="34" charset="0"/>
-                <a:ea typeface="Courier New" pitchFamily="34" charset="-122"/>
-                <a:cs typeface="Courier New" pitchFamily="34" charset="-120"/>
-              </a:rPr>
-              <a:t>email</a:t>
-            </a:r>
-            <a:endParaRPr lang="en-US" sz="1050" dirty="0"/>
+              <a:rPr lang="en-US" sz="950" dirty="0">
+                <a:solidFill>
+                  <a:srgbClr val="CCCCCC"/>
+                </a:solidFill>
+                <a:latin typeface="Courier New" pitchFamily="34" charset="0"/>
+                <a:ea typeface="Courier New" pitchFamily="34" charset="-122"/>
+                <a:cs typeface="Courier New" pitchFamily="34" charset="-120"/>
+              </a:rPr>
+              <a:t>lv_email</a:t>
+            </a:r>
+            <a:endParaRPr lang="en-US" sz="950" dirty="0"/>
           </a:p>
           <a:p>
             <a:pPr indent="0" marL="0">
@@ -14503,18 +14688,18 @@
               <a:buNone/>
             </a:pPr>
             <a:r>
-              <a:rPr lang="en-US" sz="1050" dirty="0">
-                <a:solidFill>
-                  <a:srgbClr val="CCCCCC"/>
-                </a:solidFill>
-                <a:latin typeface="Courier New" pitchFamily="34" charset="0"/>
-                <a:ea typeface="Courier New" pitchFamily="34" charset="-122"/>
-                <a:cs typeface="Courier New" pitchFamily="34" charset="-120"/>
-              </a:rPr>
-              <a:t>            </a:t>
-            </a:r>
-            <a:r>
-              <a:rPr lang="en-US" sz="1050" dirty="0">
+              <a:rPr lang="en-US" sz="950" dirty="0">
+                <a:solidFill>
+                  <a:srgbClr val="CCCCCC"/>
+                </a:solidFill>
+                <a:latin typeface="Courier New" pitchFamily="34" charset="0"/>
+                <a:ea typeface="Courier New" pitchFamily="34" charset="-122"/>
+                <a:cs typeface="Courier New" pitchFamily="34" charset="-120"/>
+              </a:rPr>
+              <a:t>  </a:t>
+            </a:r>
+            <a:r>
+              <a:rPr lang="en-US" sz="950" dirty="0">
                 <a:solidFill>
                   <a:srgbClr val="CCCCCC"/>
                 </a:solidFill>
@@ -14525,7 +14710,7 @@
               <a:t>pcre</a:t>
             </a:r>
             <a:r>
-              <a:rPr lang="en-US" sz="1050" dirty="0">
+              <a:rPr lang="en-US" sz="950" dirty="0">
                 <a:solidFill>
                   <a:srgbClr val="CCCCCC"/>
                 </a:solidFill>
@@ -14536,7 +14721,7 @@
               <a:t> </a:t>
             </a:r>
             <a:r>
-              <a:rPr lang="en-US" sz="1050" dirty="0">
+              <a:rPr lang="en-US" sz="950" dirty="0">
                 <a:solidFill>
                   <a:srgbClr val="CCCCCC"/>
                 </a:solidFill>
@@ -14547,7 +14732,7 @@
               <a:t>=</a:t>
             </a:r>
             <a:r>
-              <a:rPr lang="en-US" sz="1050" dirty="0">
+              <a:rPr lang="en-US" sz="950" dirty="0">
                 <a:solidFill>
                   <a:srgbClr val="CCCCCC"/>
                 </a:solidFill>
@@ -14558,7 +14743,7 @@
               <a:t> </a:t>
             </a:r>
             <a:r>
-              <a:rPr lang="en-US" sz="1050" dirty="0">
+              <a:rPr lang="en-US" sz="950" dirty="0">
                 <a:solidFill>
                   <a:srgbClr val="CE9178"/>
                 </a:solidFill>
@@ -14566,10 +14751,10 @@
                 <a:ea typeface="Courier New" pitchFamily="34" charset="-122"/>
                 <a:cs typeface="Courier New" pitchFamily="34" charset="-120"/>
               </a:rPr>
-              <a:t>`[\w.+-]+@[\w-]+\.[\w.]+`</a:t>
-            </a:r>
-            <a:r>
-              <a:rPr lang="en-US" sz="1050" dirty="0">
+              <a:t>`^[a-z0-9._%+\-]+@[a-z0-9\-]+(\.[a-z0-9\-]+)*\.[a-z]{2,}$`</a:t>
+            </a:r>
+            <a:r>
+              <a:rPr lang="en-US" sz="950" dirty="0">
                 <a:solidFill>
                   <a:srgbClr val="CCCCCC"/>
                 </a:solidFill>
@@ -14580,7 +14765,7 @@
               <a:t> </a:t>
             </a:r>
             <a:r>
-              <a:rPr lang="en-US" sz="1050" dirty="0">
+              <a:rPr lang="en-US" sz="950" dirty="0">
                 <a:solidFill>
                   <a:srgbClr val="CCCCCC"/>
                 </a:solidFill>
@@ -14591,7 +14776,29 @@
               <a:t>)</a:t>
             </a:r>
             <a:r>
-              <a:rPr lang="en-US" sz="1050" dirty="0">
+              <a:rPr lang="en-US" sz="950" dirty="0">
+                <a:solidFill>
+                  <a:srgbClr val="CCCCCC"/>
+                </a:solidFill>
+                <a:latin typeface="Courier New" pitchFamily="34" charset="0"/>
+                <a:ea typeface="Courier New" pitchFamily="34" charset="-122"/>
+                <a:cs typeface="Courier New" pitchFamily="34" charset="-120"/>
+              </a:rPr>
+              <a:t> </a:t>
+            </a:r>
+            <a:r>
+              <a:rPr lang="en-US" sz="950" dirty="0">
+                <a:solidFill>
+                  <a:srgbClr val="CCCCCC"/>
+                </a:solidFill>
+                <a:latin typeface="Courier New" pitchFamily="34" charset="0"/>
+                <a:ea typeface="Courier New" pitchFamily="34" charset="-122"/>
+                <a:cs typeface="Courier New" pitchFamily="34" charset="-120"/>
+              </a:rPr>
+              <a:t>)</a:t>
+            </a:r>
+            <a:r>
+              <a:rPr lang="en-US" sz="950" dirty="0">
                 <a:solidFill>
                   <a:srgbClr val="CCCCCC"/>
                 </a:solidFill>
@@ -14601,7 +14808,7 @@
               </a:rPr>
               <a:t>.</a:t>
             </a:r>
-            <a:endParaRPr lang="en-US" sz="1050" dirty="0"/>
+            <a:endParaRPr lang="en-US" sz="950" dirty="0"/>
           </a:p>
           <a:p>
             <a:pPr indent="0" marL="0">
@@ -14611,64 +14818,9 @@
               <a:buNone/>
             </a:pPr>
             <a:r>
-              <a:rPr lang="en-US" sz="1050" dirty="0">
-                <a:solidFill>
-                  <a:srgbClr val="CCCCCC"/>
-                </a:solidFill>
-                <a:latin typeface="Courier New" pitchFamily="34" charset="0"/>
-                <a:ea typeface="Courier New" pitchFamily="34" charset="-122"/>
-                <a:cs typeface="Courier New" pitchFamily="34" charset="-120"/>
-              </a:rPr>
-              <a:t>  </a:t>
-            </a:r>
-            <a:r>
-              <a:rPr lang="en-US" sz="1050" dirty="0">
-                <a:solidFill>
-                  <a:srgbClr val="CCCCCC"/>
-                </a:solidFill>
-                <a:latin typeface="Courier New" pitchFamily="34" charset="0"/>
-                <a:ea typeface="Courier New" pitchFamily="34" charset="-122"/>
-                <a:cs typeface="Courier New" pitchFamily="34" charset="-120"/>
-              </a:rPr>
-              <a:t>out-</a:t>
-            </a:r>
-            <a:r>
-              <a:rPr lang="en-US" sz="1050" dirty="0">
-                <a:solidFill>
-                  <a:srgbClr val="CCCCCC"/>
-                </a:solidFill>
-                <a:latin typeface="Courier New" pitchFamily="34" charset="0"/>
-                <a:ea typeface="Courier New" pitchFamily="34" charset="-122"/>
-                <a:cs typeface="Courier New" pitchFamily="34" charset="-120"/>
-              </a:rPr>
-              <a:t>&gt;</a:t>
-            </a:r>
-            <a:r>
-              <a:rPr lang="en-US" sz="1050" dirty="0">
-                <a:solidFill>
-                  <a:srgbClr val="CCCCCC"/>
-                </a:solidFill>
-                <a:latin typeface="Courier New" pitchFamily="34" charset="0"/>
-                <a:ea typeface="Courier New" pitchFamily="34" charset="-122"/>
-                <a:cs typeface="Courier New" pitchFamily="34" charset="-120"/>
-              </a:rPr>
-              <a:t>write</a:t>
-            </a:r>
-            <a:r>
-              <a:rPr lang="en-US" sz="1050" dirty="0">
-                <a:solidFill>
-                  <a:srgbClr val="CCCCCC"/>
-                </a:solidFill>
-                <a:latin typeface="Courier New" pitchFamily="34" charset="0"/>
-                <a:ea typeface="Courier New" pitchFamily="34" charset="-122"/>
-                <a:cs typeface="Courier New" pitchFamily="34" charset="-120"/>
-              </a:rPr>
-              <a:t>(</a:t>
-            </a:r>
-            <a:r>
-              <a:rPr lang="en-US" sz="1050" dirty="0">
-                <a:solidFill>
-                  <a:srgbClr val="CCCCCC"/>
+              <a:rPr lang="en-US" sz="950" dirty="0">
+                <a:solidFill>
+                  <a:srgbClr val="000000"/>
                 </a:solidFill>
                 <a:latin typeface="Courier New" pitchFamily="34" charset="0"/>
                 <a:ea typeface="Courier New" pitchFamily="34" charset="-122"/>
@@ -14676,51 +14828,7 @@
               </a:rPr>
               <a:t> </a:t>
             </a:r>
-            <a:r>
-              <a:rPr lang="en-US" sz="1050" dirty="0">
-                <a:solidFill>
-                  <a:srgbClr val="CE9178"/>
-                </a:solidFill>
-                <a:latin typeface="Courier New" pitchFamily="34" charset="0"/>
-                <a:ea typeface="Courier New" pitchFamily="34" charset="-122"/>
-                <a:cs typeface="Courier New" pitchFamily="34" charset="-120"/>
-              </a:rPr>
-              <a:t>`E-mail com formato válido`</a:t>
-            </a:r>
-            <a:r>
-              <a:rPr lang="en-US" sz="1050" dirty="0">
-                <a:solidFill>
-                  <a:srgbClr val="CCCCCC"/>
-                </a:solidFill>
-                <a:latin typeface="Courier New" pitchFamily="34" charset="0"/>
-                <a:ea typeface="Courier New" pitchFamily="34" charset="-122"/>
-                <a:cs typeface="Courier New" pitchFamily="34" charset="-120"/>
-              </a:rPr>
-              <a:t> </a:t>
-            </a:r>
-            <a:r>
-              <a:rPr lang="en-US" sz="1050" dirty="0">
-                <a:solidFill>
-                  <a:srgbClr val="CCCCCC"/>
-                </a:solidFill>
-                <a:latin typeface="Courier New" pitchFamily="34" charset="0"/>
-                <a:ea typeface="Courier New" pitchFamily="34" charset="-122"/>
-                <a:cs typeface="Courier New" pitchFamily="34" charset="-120"/>
-              </a:rPr>
-              <a:t>)</a:t>
-            </a:r>
-            <a:r>
-              <a:rPr lang="en-US" sz="1050" dirty="0">
-                <a:solidFill>
-                  <a:srgbClr val="CCCCCC"/>
-                </a:solidFill>
-                <a:latin typeface="Courier New" pitchFamily="34" charset="0"/>
-                <a:ea typeface="Courier New" pitchFamily="34" charset="-122"/>
-                <a:cs typeface="Courier New" pitchFamily="34" charset="-120"/>
-              </a:rPr>
-              <a:t>.</a:t>
-            </a:r>
-            <a:endParaRPr lang="en-US" sz="1050" dirty="0"/>
+            <a:endParaRPr lang="en-US" sz="950" dirty="0"/>
           </a:p>
           <a:p>
             <a:pPr indent="0" marL="0">
@@ -14730,28 +14838,17 @@
               <a:buNone/>
             </a:pPr>
             <a:r>
-              <a:rPr lang="en-US" sz="1050" dirty="0">
-                <a:solidFill>
-                  <a:srgbClr val="569CD6"/>
-                </a:solidFill>
-                <a:latin typeface="Courier New" pitchFamily="34" charset="0"/>
-                <a:ea typeface="Courier New" pitchFamily="34" charset="-122"/>
-                <a:cs typeface="Courier New" pitchFamily="34" charset="-120"/>
-              </a:rPr>
-              <a:t>ENDIF</a:t>
-            </a:r>
-            <a:r>
-              <a:rPr lang="en-US" sz="1050" dirty="0">
-                <a:solidFill>
-                  <a:srgbClr val="CCCCCC"/>
-                </a:solidFill>
-                <a:latin typeface="Courier New" pitchFamily="34" charset="0"/>
-                <a:ea typeface="Courier New" pitchFamily="34" charset="-122"/>
-                <a:cs typeface="Courier New" pitchFamily="34" charset="-120"/>
-              </a:rPr>
-              <a:t>.</a:t>
-            </a:r>
-            <a:endParaRPr lang="en-US" sz="1050" dirty="0"/>
+              <a:rPr lang="en-US" sz="950" i="1" dirty="0">
+                <a:solidFill>
+                  <a:srgbClr val="6A9955"/>
+                </a:solidFill>
+                <a:latin typeface="Courier New" pitchFamily="34" charset="0"/>
+                <a:ea typeface="Courier New" pitchFamily="34" charset="-122"/>
+                <a:cs typeface="Courier New" pitchFamily="34" charset="-120"/>
+              </a:rPr>
+              <a:t>" somente_digitos: '529.982.247-25' vira `52998224725`</a:t>
+            </a:r>
+            <a:endParaRPr lang="en-US" sz="950" dirty="0"/>
           </a:p>
           <a:p>
             <a:pPr indent="0" marL="0">
@@ -14761,9 +14858,20 @@
               <a:buNone/>
             </a:pPr>
             <a:r>
-              <a:rPr lang="en-US" sz="1050" dirty="0">
-                <a:solidFill>
-                  <a:srgbClr val="000000"/>
+              <a:rPr lang="en-US" sz="950" dirty="0">
+                <a:solidFill>
+                  <a:srgbClr val="CCCCCC"/>
+                </a:solidFill>
+                <a:latin typeface="Courier New" pitchFamily="34" charset="0"/>
+                <a:ea typeface="Courier New" pitchFamily="34" charset="-122"/>
+                <a:cs typeface="Courier New" pitchFamily="34" charset="-120"/>
+              </a:rPr>
+              <a:t>rv_valor</a:t>
+            </a:r>
+            <a:r>
+              <a:rPr lang="en-US" sz="950" dirty="0">
+                <a:solidFill>
+                  <a:srgbClr val="CCCCCC"/>
                 </a:solidFill>
                 <a:latin typeface="Courier New" pitchFamily="34" charset="0"/>
                 <a:ea typeface="Courier New" pitchFamily="34" charset="-122"/>
@@ -14771,7 +14879,117 @@
               </a:rPr>
               <a:t> </a:t>
             </a:r>
-            <a:endParaRPr lang="en-US" sz="1050" dirty="0"/>
+            <a:r>
+              <a:rPr lang="en-US" sz="950" dirty="0">
+                <a:solidFill>
+                  <a:srgbClr val="CCCCCC"/>
+                </a:solidFill>
+                <a:latin typeface="Courier New" pitchFamily="34" charset="0"/>
+                <a:ea typeface="Courier New" pitchFamily="34" charset="-122"/>
+                <a:cs typeface="Courier New" pitchFamily="34" charset="-120"/>
+              </a:rPr>
+              <a:t>=</a:t>
+            </a:r>
+            <a:r>
+              <a:rPr lang="en-US" sz="950" dirty="0">
+                <a:solidFill>
+                  <a:srgbClr val="CCCCCC"/>
+                </a:solidFill>
+                <a:latin typeface="Courier New" pitchFamily="34" charset="0"/>
+                <a:ea typeface="Courier New" pitchFamily="34" charset="-122"/>
+                <a:cs typeface="Courier New" pitchFamily="34" charset="-120"/>
+              </a:rPr>
+              <a:t> </a:t>
+            </a:r>
+            <a:r>
+              <a:rPr lang="en-US" sz="950" dirty="0">
+                <a:solidFill>
+                  <a:srgbClr val="CCCCCC"/>
+                </a:solidFill>
+                <a:latin typeface="Courier New" pitchFamily="34" charset="0"/>
+                <a:ea typeface="Courier New" pitchFamily="34" charset="-122"/>
+                <a:cs typeface="Courier New" pitchFamily="34" charset="-120"/>
+              </a:rPr>
+              <a:t>replace</a:t>
+            </a:r>
+            <a:r>
+              <a:rPr lang="en-US" sz="950" dirty="0">
+                <a:solidFill>
+                  <a:srgbClr val="CCCCCC"/>
+                </a:solidFill>
+                <a:latin typeface="Courier New" pitchFamily="34" charset="0"/>
+                <a:ea typeface="Courier New" pitchFamily="34" charset="-122"/>
+                <a:cs typeface="Courier New" pitchFamily="34" charset="-120"/>
+              </a:rPr>
+              <a:t>(</a:t>
+            </a:r>
+            <a:r>
+              <a:rPr lang="en-US" sz="950" dirty="0">
+                <a:solidFill>
+                  <a:srgbClr val="CCCCCC"/>
+                </a:solidFill>
+                <a:latin typeface="Courier New" pitchFamily="34" charset="0"/>
+                <a:ea typeface="Courier New" pitchFamily="34" charset="-122"/>
+                <a:cs typeface="Courier New" pitchFamily="34" charset="-120"/>
+              </a:rPr>
+              <a:t> </a:t>
+            </a:r>
+            <a:r>
+              <a:rPr lang="en-US" sz="950" dirty="0">
+                <a:solidFill>
+                  <a:srgbClr val="CCCCCC"/>
+                </a:solidFill>
+                <a:latin typeface="Courier New" pitchFamily="34" charset="0"/>
+                <a:ea typeface="Courier New" pitchFamily="34" charset="-122"/>
+                <a:cs typeface="Courier New" pitchFamily="34" charset="-120"/>
+              </a:rPr>
+              <a:t>val</a:t>
+            </a:r>
+            <a:r>
+              <a:rPr lang="en-US" sz="950" dirty="0">
+                <a:solidFill>
+                  <a:srgbClr val="CCCCCC"/>
+                </a:solidFill>
+                <a:latin typeface="Courier New" pitchFamily="34" charset="0"/>
+                <a:ea typeface="Courier New" pitchFamily="34" charset="-122"/>
+                <a:cs typeface="Courier New" pitchFamily="34" charset="-120"/>
+              </a:rPr>
+              <a:t>  </a:t>
+            </a:r>
+            <a:r>
+              <a:rPr lang="en-US" sz="950" dirty="0">
+                <a:solidFill>
+                  <a:srgbClr val="CCCCCC"/>
+                </a:solidFill>
+                <a:latin typeface="Courier New" pitchFamily="34" charset="0"/>
+                <a:ea typeface="Courier New" pitchFamily="34" charset="-122"/>
+                <a:cs typeface="Courier New" pitchFamily="34" charset="-120"/>
+              </a:rPr>
+              <a:t>=</a:t>
+            </a:r>
+            <a:r>
+              <a:rPr lang="en-US" sz="950" dirty="0">
+                <a:solidFill>
+                  <a:srgbClr val="CCCCCC"/>
+                </a:solidFill>
+                <a:latin typeface="Courier New" pitchFamily="34" charset="0"/>
+                <a:ea typeface="Courier New" pitchFamily="34" charset="-122"/>
+                <a:cs typeface="Courier New" pitchFamily="34" charset="-120"/>
+              </a:rPr>
+              <a:t> </a:t>
+            </a:r>
+            <a:r>
+              <a:rPr lang="en-US" sz="950" dirty="0">
+                <a:solidFill>
+                  <a:srgbClr val="CCCCCC"/>
+                </a:solidFill>
+                <a:latin typeface="Courier New" pitchFamily="34" charset="0"/>
+                <a:ea typeface="Courier New" pitchFamily="34" charset="-122"/>
+                <a:cs typeface="Courier New" pitchFamily="34" charset="-120"/>
+              </a:rPr>
+              <a:t>iv_valor</a:t>
+            </a:r>
+            <a:endParaRPr lang="en-US" sz="950" dirty="0"/>
           </a:p>
           <a:p>
             <a:pPr indent="0" marL="0">
@@ -14781,62 +14999,40 @@
               <a:buNone/>
             </a:pPr>
             <a:r>
-              <a:rPr lang="en-US" sz="1050" dirty="0">
-                <a:solidFill>
-                  <a:srgbClr val="569CD6"/>
-                </a:solidFill>
-                <a:latin typeface="Courier New" pitchFamily="34" charset="0"/>
-                <a:ea typeface="Courier New" pitchFamily="34" charset="-122"/>
-                <a:cs typeface="Courier New" pitchFamily="34" charset="-120"/>
-              </a:rPr>
-              <a:t>DATA</a:t>
-            </a:r>
-            <a:r>
-              <a:rPr lang="en-US" sz="1050" dirty="0">
-                <a:solidFill>
-                  <a:srgbClr val="CCCCCC"/>
-                </a:solidFill>
-                <a:latin typeface="Courier New" pitchFamily="34" charset="0"/>
-                <a:ea typeface="Courier New" pitchFamily="34" charset="-122"/>
-                <a:cs typeface="Courier New" pitchFamily="34" charset="-120"/>
-              </a:rPr>
-              <a:t>(</a:t>
-            </a:r>
-            <a:r>
-              <a:rPr lang="en-US" sz="1050" dirty="0">
-                <a:solidFill>
-                  <a:srgbClr val="CCCCCC"/>
-                </a:solidFill>
-                <a:latin typeface="Courier New" pitchFamily="34" charset="0"/>
-                <a:ea typeface="Courier New" pitchFamily="34" charset="-122"/>
-                <a:cs typeface="Courier New" pitchFamily="34" charset="-120"/>
-              </a:rPr>
-              <a:t>phone</a:t>
-            </a:r>
-            <a:r>
-              <a:rPr lang="en-US" sz="1050" dirty="0">
-                <a:solidFill>
-                  <a:srgbClr val="CCCCCC"/>
-                </a:solidFill>
-                <a:latin typeface="Courier New" pitchFamily="34" charset="0"/>
-                <a:ea typeface="Courier New" pitchFamily="34" charset="-122"/>
-                <a:cs typeface="Courier New" pitchFamily="34" charset="-120"/>
-              </a:rPr>
-              <a:t>)</a:t>
-            </a:r>
-            <a:r>
-              <a:rPr lang="en-US" sz="1050" dirty="0">
-                <a:solidFill>
-                  <a:srgbClr val="CCCCCC"/>
-                </a:solidFill>
-                <a:latin typeface="Courier New" pitchFamily="34" charset="0"/>
-                <a:ea typeface="Courier New" pitchFamily="34" charset="-122"/>
-                <a:cs typeface="Courier New" pitchFamily="34" charset="-120"/>
-              </a:rPr>
-              <a:t>  </a:t>
-            </a:r>
-            <a:r>
-              <a:rPr lang="en-US" sz="1050" dirty="0">
+              <a:rPr lang="en-US" sz="950" dirty="0">
+                <a:solidFill>
+                  <a:srgbClr val="CCCCCC"/>
+                </a:solidFill>
+                <a:latin typeface="Courier New" pitchFamily="34" charset="0"/>
+                <a:ea typeface="Courier New" pitchFamily="34" charset="-122"/>
+                <a:cs typeface="Courier New" pitchFamily="34" charset="-120"/>
+              </a:rPr>
+              <a:t>                    </a:t>
+            </a:r>
+            <a:r>
+              <a:rPr lang="en-US" sz="950" dirty="0">
+                <a:solidFill>
+                  <a:srgbClr val="CCCCCC"/>
+                </a:solidFill>
+                <a:latin typeface="Courier New" pitchFamily="34" charset="0"/>
+                <a:ea typeface="Courier New" pitchFamily="34" charset="-122"/>
+                <a:cs typeface="Courier New" pitchFamily="34" charset="-120"/>
+              </a:rPr>
+              <a:t>pcre</a:t>
+            </a:r>
+            <a:r>
+              <a:rPr lang="en-US" sz="950" dirty="0">
+                <a:solidFill>
+                  <a:srgbClr val="CCCCCC"/>
+                </a:solidFill>
+                <a:latin typeface="Courier New" pitchFamily="34" charset="0"/>
+                <a:ea typeface="Courier New" pitchFamily="34" charset="-122"/>
+                <a:cs typeface="Courier New" pitchFamily="34" charset="-120"/>
+              </a:rPr>
+              <a:t> </a:t>
+            </a:r>
+            <a:r>
+              <a:rPr lang="en-US" sz="950" dirty="0">
                 <a:solidFill>
                   <a:srgbClr val="CCCCCC"/>
                 </a:solidFill>
@@ -14847,7 +15043,7 @@
               <a:t>=</a:t>
             </a:r>
             <a:r>
-              <a:rPr lang="en-US" sz="1050" dirty="0">
+              <a:rPr lang="en-US" sz="950" dirty="0">
                 <a:solidFill>
                   <a:srgbClr val="CCCCCC"/>
                 </a:solidFill>
@@ -14858,7 +15054,7 @@
               <a:t> </a:t>
             </a:r>
             <a:r>
-              <a:rPr lang="en-US" sz="1050" dirty="0">
+              <a:rPr lang="en-US" sz="950" dirty="0">
                 <a:solidFill>
                   <a:srgbClr val="CE9178"/>
                 </a:solidFill>
@@ -14866,20 +15062,9 @@
                 <a:ea typeface="Courier New" pitchFamily="34" charset="-122"/>
                 <a:cs typeface="Courier New" pitchFamily="34" charset="-120"/>
               </a:rPr>
-              <a:t>`(11) 98765-4321`</a:t>
-            </a:r>
-            <a:r>
-              <a:rPr lang="en-US" sz="1050" dirty="0">
-                <a:solidFill>
-                  <a:srgbClr val="CCCCCC"/>
-                </a:solidFill>
-                <a:latin typeface="Courier New" pitchFamily="34" charset="0"/>
-                <a:ea typeface="Courier New" pitchFamily="34" charset="-122"/>
-                <a:cs typeface="Courier New" pitchFamily="34" charset="-120"/>
-              </a:rPr>
-              <a:t>.</a:t>
-            </a:r>
-            <a:endParaRPr lang="en-US" sz="1050" dirty="0"/>
+              <a:t>`[^0-9]`</a:t>
+            </a:r>
+            <a:endParaRPr lang="en-US" sz="950" dirty="0"/>
           </a:p>
           <a:p>
             <a:pPr indent="0" marL="0">
@@ -14889,51 +15074,29 @@
               <a:buNone/>
             </a:pPr>
             <a:r>
-              <a:rPr lang="en-US" sz="1050" dirty="0">
-                <a:solidFill>
-                  <a:srgbClr val="569CD6"/>
-                </a:solidFill>
-                <a:latin typeface="Courier New" pitchFamily="34" charset="0"/>
-                <a:ea typeface="Courier New" pitchFamily="34" charset="-122"/>
-                <a:cs typeface="Courier New" pitchFamily="34" charset="-120"/>
-              </a:rPr>
-              <a:t>DATA</a:t>
-            </a:r>
-            <a:r>
-              <a:rPr lang="en-US" sz="1050" dirty="0">
-                <a:solidFill>
-                  <a:srgbClr val="CCCCCC"/>
-                </a:solidFill>
-                <a:latin typeface="Courier New" pitchFamily="34" charset="0"/>
-                <a:ea typeface="Courier New" pitchFamily="34" charset="-122"/>
-                <a:cs typeface="Courier New" pitchFamily="34" charset="-120"/>
-              </a:rPr>
-              <a:t>(</a:t>
-            </a:r>
-            <a:r>
-              <a:rPr lang="en-US" sz="1050" dirty="0">
-                <a:solidFill>
-                  <a:srgbClr val="CCCCCC"/>
-                </a:solidFill>
-                <a:latin typeface="Courier New" pitchFamily="34" charset="0"/>
-                <a:ea typeface="Courier New" pitchFamily="34" charset="-122"/>
-                <a:cs typeface="Courier New" pitchFamily="34" charset="-120"/>
-              </a:rPr>
-              <a:t>digits</a:t>
-            </a:r>
-            <a:r>
-              <a:rPr lang="en-US" sz="1050" dirty="0">
-                <a:solidFill>
-                  <a:srgbClr val="CCCCCC"/>
-                </a:solidFill>
-                <a:latin typeface="Courier New" pitchFamily="34" charset="0"/>
-                <a:ea typeface="Courier New" pitchFamily="34" charset="-122"/>
-                <a:cs typeface="Courier New" pitchFamily="34" charset="-120"/>
-              </a:rPr>
-              <a:t>)</a:t>
-            </a:r>
-            <a:r>
-              <a:rPr lang="en-US" sz="1050" dirty="0">
+              <a:rPr lang="en-US" sz="950" dirty="0">
+                <a:solidFill>
+                  <a:srgbClr val="CCCCCC"/>
+                </a:solidFill>
+                <a:latin typeface="Courier New" pitchFamily="34" charset="0"/>
+                <a:ea typeface="Courier New" pitchFamily="34" charset="-122"/>
+                <a:cs typeface="Courier New" pitchFamily="34" charset="-120"/>
+              </a:rPr>
+              <a:t>                    </a:t>
+            </a:r>
+            <a:r>
+              <a:rPr lang="en-US" sz="950" dirty="0">
+                <a:solidFill>
+                  <a:srgbClr val="CCCCCC"/>
+                </a:solidFill>
+                <a:latin typeface="Courier New" pitchFamily="34" charset="0"/>
+                <a:ea typeface="Courier New" pitchFamily="34" charset="-122"/>
+                <a:cs typeface="Courier New" pitchFamily="34" charset="-120"/>
+              </a:rPr>
+              <a:t>with</a:t>
+            </a:r>
+            <a:r>
+              <a:rPr lang="en-US" sz="950" dirty="0">
                 <a:solidFill>
                   <a:srgbClr val="CCCCCC"/>
                 </a:solidFill>
@@ -14944,7 +15107,7 @@
               <a:t> </a:t>
             </a:r>
             <a:r>
-              <a:rPr lang="en-US" sz="1050" dirty="0">
+              <a:rPr lang="en-US" sz="950" dirty="0">
                 <a:solidFill>
                   <a:srgbClr val="CCCCCC"/>
                 </a:solidFill>
@@ -14955,7 +15118,7 @@
               <a:t>=</a:t>
             </a:r>
             <a:r>
-              <a:rPr lang="en-US" sz="1050" dirty="0">
+              <a:rPr lang="en-US" sz="950" dirty="0">
                 <a:solidFill>
                   <a:srgbClr val="CCCCCC"/>
                 </a:solidFill>
@@ -14966,150 +15129,7 @@
               <a:t> </a:t>
             </a:r>
             <a:r>
-              <a:rPr lang="en-US" sz="1050" dirty="0">
-                <a:solidFill>
-                  <a:srgbClr val="CCCCCC"/>
-                </a:solidFill>
-                <a:latin typeface="Courier New" pitchFamily="34" charset="0"/>
-                <a:ea typeface="Courier New" pitchFamily="34" charset="-122"/>
-                <a:cs typeface="Courier New" pitchFamily="34" charset="-120"/>
-              </a:rPr>
-              <a:t>replace</a:t>
-            </a:r>
-            <a:r>
-              <a:rPr lang="en-US" sz="1050" dirty="0">
-                <a:solidFill>
-                  <a:srgbClr val="CCCCCC"/>
-                </a:solidFill>
-                <a:latin typeface="Courier New" pitchFamily="34" charset="0"/>
-                <a:ea typeface="Courier New" pitchFamily="34" charset="-122"/>
-                <a:cs typeface="Courier New" pitchFamily="34" charset="-120"/>
-              </a:rPr>
-              <a:t>(</a:t>
-            </a:r>
-            <a:r>
-              <a:rPr lang="en-US" sz="1050" dirty="0">
-                <a:solidFill>
-                  <a:srgbClr val="CCCCCC"/>
-                </a:solidFill>
-                <a:latin typeface="Courier New" pitchFamily="34" charset="0"/>
-                <a:ea typeface="Courier New" pitchFamily="34" charset="-122"/>
-                <a:cs typeface="Courier New" pitchFamily="34" charset="-120"/>
-              </a:rPr>
-              <a:t> </a:t>
-            </a:r>
-            <a:r>
-              <a:rPr lang="en-US" sz="1050" dirty="0">
-                <a:solidFill>
-                  <a:srgbClr val="CCCCCC"/>
-                </a:solidFill>
-                <a:latin typeface="Courier New" pitchFamily="34" charset="0"/>
-                <a:ea typeface="Courier New" pitchFamily="34" charset="-122"/>
-                <a:cs typeface="Courier New" pitchFamily="34" charset="-120"/>
-              </a:rPr>
-              <a:t>val</a:t>
-            </a:r>
-            <a:r>
-              <a:rPr lang="en-US" sz="1050" dirty="0">
-                <a:solidFill>
-                  <a:srgbClr val="CCCCCC"/>
-                </a:solidFill>
-                <a:latin typeface="Courier New" pitchFamily="34" charset="0"/>
-                <a:ea typeface="Courier New" pitchFamily="34" charset="-122"/>
-                <a:cs typeface="Courier New" pitchFamily="34" charset="-120"/>
-              </a:rPr>
-              <a:t> </a:t>
-            </a:r>
-            <a:r>
-              <a:rPr lang="en-US" sz="1050" dirty="0">
-                <a:solidFill>
-                  <a:srgbClr val="CCCCCC"/>
-                </a:solidFill>
-                <a:latin typeface="Courier New" pitchFamily="34" charset="0"/>
-                <a:ea typeface="Courier New" pitchFamily="34" charset="-122"/>
-                <a:cs typeface="Courier New" pitchFamily="34" charset="-120"/>
-              </a:rPr>
-              <a:t>=</a:t>
-            </a:r>
-            <a:r>
-              <a:rPr lang="en-US" sz="1050" dirty="0">
-                <a:solidFill>
-                  <a:srgbClr val="CCCCCC"/>
-                </a:solidFill>
-                <a:latin typeface="Courier New" pitchFamily="34" charset="0"/>
-                <a:ea typeface="Courier New" pitchFamily="34" charset="-122"/>
-                <a:cs typeface="Courier New" pitchFamily="34" charset="-120"/>
-              </a:rPr>
-              <a:t> </a:t>
-            </a:r>
-            <a:r>
-              <a:rPr lang="en-US" sz="1050" dirty="0">
-                <a:solidFill>
-                  <a:srgbClr val="CCCCCC"/>
-                </a:solidFill>
-                <a:latin typeface="Courier New" pitchFamily="34" charset="0"/>
-                <a:ea typeface="Courier New" pitchFamily="34" charset="-122"/>
-                <a:cs typeface="Courier New" pitchFamily="34" charset="-120"/>
-              </a:rPr>
-              <a:t>phone</a:t>
-            </a:r>
-            <a:r>
-              <a:rPr lang="en-US" sz="1050" dirty="0">
-                <a:solidFill>
-                  <a:srgbClr val="CCCCCC"/>
-                </a:solidFill>
-                <a:latin typeface="Courier New" pitchFamily="34" charset="0"/>
-                <a:ea typeface="Courier New" pitchFamily="34" charset="-122"/>
-                <a:cs typeface="Courier New" pitchFamily="34" charset="-120"/>
-              </a:rPr>
-              <a:t> </a:t>
-            </a:r>
-            <a:r>
-              <a:rPr lang="en-US" sz="1050" dirty="0">
-                <a:solidFill>
-                  <a:srgbClr val="CCCCCC"/>
-                </a:solidFill>
-                <a:latin typeface="Courier New" pitchFamily="34" charset="0"/>
-                <a:ea typeface="Courier New" pitchFamily="34" charset="-122"/>
-                <a:cs typeface="Courier New" pitchFamily="34" charset="-120"/>
-              </a:rPr>
-              <a:t>pcre</a:t>
-            </a:r>
-            <a:r>
-              <a:rPr lang="en-US" sz="1050" dirty="0">
-                <a:solidFill>
-                  <a:srgbClr val="CCCCCC"/>
-                </a:solidFill>
-                <a:latin typeface="Courier New" pitchFamily="34" charset="0"/>
-                <a:ea typeface="Courier New" pitchFamily="34" charset="-122"/>
-                <a:cs typeface="Courier New" pitchFamily="34" charset="-120"/>
-              </a:rPr>
-              <a:t> </a:t>
-            </a:r>
-            <a:r>
-              <a:rPr lang="en-US" sz="1050" dirty="0">
-                <a:solidFill>
-                  <a:srgbClr val="CCCCCC"/>
-                </a:solidFill>
-                <a:latin typeface="Courier New" pitchFamily="34" charset="0"/>
-                <a:ea typeface="Courier New" pitchFamily="34" charset="-122"/>
-                <a:cs typeface="Courier New" pitchFamily="34" charset="-120"/>
-              </a:rPr>
-              <a:t>=</a:t>
-            </a:r>
-            <a:r>
-              <a:rPr lang="en-US" sz="1050" dirty="0">
-                <a:solidFill>
-                  <a:srgbClr val="CCCCCC"/>
-                </a:solidFill>
-                <a:latin typeface="Courier New" pitchFamily="34" charset="0"/>
-                <a:ea typeface="Courier New" pitchFamily="34" charset="-122"/>
-                <a:cs typeface="Courier New" pitchFamily="34" charset="-120"/>
-              </a:rPr>
-              <a:t> </a:t>
-            </a:r>
-            <a:r>
-              <a:rPr lang="en-US" sz="1050" dirty="0">
+              <a:rPr lang="en-US" sz="950" dirty="0">
                 <a:solidFill>
                   <a:srgbClr val="CE9178"/>
                 </a:solidFill>
@@ -15117,174 +15137,9 @@
                 <a:ea typeface="Courier New" pitchFamily="34" charset="-122"/>
                 <a:cs typeface="Courier New" pitchFamily="34" charset="-120"/>
               </a:rPr>
-              <a:t>`\D`</a:t>
-            </a:r>
-            <a:r>
-              <a:rPr lang="en-US" sz="1050" dirty="0">
-                <a:solidFill>
-                  <a:srgbClr val="CCCCCC"/>
-                </a:solidFill>
-                <a:latin typeface="Courier New" pitchFamily="34" charset="0"/>
-                <a:ea typeface="Courier New" pitchFamily="34" charset="-122"/>
-                <a:cs typeface="Courier New" pitchFamily="34" charset="-120"/>
-              </a:rPr>
-              <a:t> </a:t>
-            </a:r>
-            <a:r>
-              <a:rPr lang="en-US" sz="1050" dirty="0">
-                <a:solidFill>
-                  <a:srgbClr val="CCCCCC"/>
-                </a:solidFill>
-                <a:latin typeface="Courier New" pitchFamily="34" charset="0"/>
-                <a:ea typeface="Courier New" pitchFamily="34" charset="-122"/>
-                <a:cs typeface="Courier New" pitchFamily="34" charset="-120"/>
-              </a:rPr>
-              <a:t>with</a:t>
-            </a:r>
-            <a:r>
-              <a:rPr lang="en-US" sz="1050" dirty="0">
-                <a:solidFill>
-                  <a:srgbClr val="CCCCCC"/>
-                </a:solidFill>
-                <a:latin typeface="Courier New" pitchFamily="34" charset="0"/>
-                <a:ea typeface="Courier New" pitchFamily="34" charset="-122"/>
-                <a:cs typeface="Courier New" pitchFamily="34" charset="-120"/>
-              </a:rPr>
-              <a:t> </a:t>
-            </a:r>
-            <a:r>
-              <a:rPr lang="en-US" sz="1050" dirty="0">
-                <a:solidFill>
-                  <a:srgbClr val="CCCCCC"/>
-                </a:solidFill>
-                <a:latin typeface="Courier New" pitchFamily="34" charset="0"/>
-                <a:ea typeface="Courier New" pitchFamily="34" charset="-122"/>
-                <a:cs typeface="Courier New" pitchFamily="34" charset="-120"/>
-              </a:rPr>
-              <a:t>=</a:t>
-            </a:r>
-            <a:r>
-              <a:rPr lang="en-US" sz="1050" dirty="0">
-                <a:solidFill>
-                  <a:srgbClr val="CCCCCC"/>
-                </a:solidFill>
-                <a:latin typeface="Courier New" pitchFamily="34" charset="0"/>
-                <a:ea typeface="Courier New" pitchFamily="34" charset="-122"/>
-                <a:cs typeface="Courier New" pitchFamily="34" charset="-120"/>
-              </a:rPr>
-              <a:t> </a:t>
-            </a:r>
-            <a:r>
-              <a:rPr lang="en-US" sz="1050" dirty="0">
-                <a:solidFill>
-                  <a:srgbClr val="CE9178"/>
-                </a:solidFill>
-                <a:latin typeface="Courier New" pitchFamily="34" charset="0"/>
-                <a:ea typeface="Courier New" pitchFamily="34" charset="-122"/>
-                <a:cs typeface="Courier New" pitchFamily="34" charset="-120"/>
-              </a:rPr>
               <a:t>``</a:t>
             </a:r>
-            <a:r>
-              <a:rPr lang="en-US" sz="1050" dirty="0">
-                <a:solidFill>
-                  <a:srgbClr val="CCCCCC"/>
-                </a:solidFill>
-                <a:latin typeface="Courier New" pitchFamily="34" charset="0"/>
-                <a:ea typeface="Courier New" pitchFamily="34" charset="-122"/>
-                <a:cs typeface="Courier New" pitchFamily="34" charset="-120"/>
-              </a:rPr>
-              <a:t> </a:t>
-            </a:r>
-            <a:r>
-              <a:rPr lang="en-US" sz="1050" dirty="0">
-                <a:solidFill>
-                  <a:srgbClr val="CCCCCC"/>
-                </a:solidFill>
-                <a:latin typeface="Courier New" pitchFamily="34" charset="0"/>
-                <a:ea typeface="Courier New" pitchFamily="34" charset="-122"/>
-                <a:cs typeface="Courier New" pitchFamily="34" charset="-120"/>
-              </a:rPr>
-              <a:t>occ</a:t>
-            </a:r>
-            <a:r>
-              <a:rPr lang="en-US" sz="1050" dirty="0">
-                <a:solidFill>
-                  <a:srgbClr val="CCCCCC"/>
-                </a:solidFill>
-                <a:latin typeface="Courier New" pitchFamily="34" charset="0"/>
-                <a:ea typeface="Courier New" pitchFamily="34" charset="-122"/>
-                <a:cs typeface="Courier New" pitchFamily="34" charset="-120"/>
-              </a:rPr>
-              <a:t> </a:t>
-            </a:r>
-            <a:r>
-              <a:rPr lang="en-US" sz="1050" dirty="0">
-                <a:solidFill>
-                  <a:srgbClr val="CCCCCC"/>
-                </a:solidFill>
-                <a:latin typeface="Courier New" pitchFamily="34" charset="0"/>
-                <a:ea typeface="Courier New" pitchFamily="34" charset="-122"/>
-                <a:cs typeface="Courier New" pitchFamily="34" charset="-120"/>
-              </a:rPr>
-              <a:t>=</a:t>
-            </a:r>
-            <a:r>
-              <a:rPr lang="en-US" sz="1050" dirty="0">
-                <a:solidFill>
-                  <a:srgbClr val="CCCCCC"/>
-                </a:solidFill>
-                <a:latin typeface="Courier New" pitchFamily="34" charset="0"/>
-                <a:ea typeface="Courier New" pitchFamily="34" charset="-122"/>
-                <a:cs typeface="Courier New" pitchFamily="34" charset="-120"/>
-              </a:rPr>
-              <a:t> </a:t>
-            </a:r>
-            <a:r>
-              <a:rPr lang="en-US" sz="1050" dirty="0">
-                <a:solidFill>
-                  <a:srgbClr val="B5CEA8"/>
-                </a:solidFill>
-                <a:latin typeface="Courier New" pitchFamily="34" charset="0"/>
-                <a:ea typeface="Courier New" pitchFamily="34" charset="-122"/>
-                <a:cs typeface="Courier New" pitchFamily="34" charset="-120"/>
-              </a:rPr>
-              <a:t>0</a:t>
-            </a:r>
-            <a:r>
-              <a:rPr lang="en-US" sz="1050" dirty="0">
-                <a:solidFill>
-                  <a:srgbClr val="CCCCCC"/>
-                </a:solidFill>
-                <a:latin typeface="Courier New" pitchFamily="34" charset="0"/>
-                <a:ea typeface="Courier New" pitchFamily="34" charset="-122"/>
-                <a:cs typeface="Courier New" pitchFamily="34" charset="-120"/>
-              </a:rPr>
-              <a:t> </a:t>
-            </a:r>
-            <a:r>
-              <a:rPr lang="en-US" sz="1050" dirty="0">
-                <a:solidFill>
-                  <a:srgbClr val="CCCCCC"/>
-                </a:solidFill>
-                <a:latin typeface="Courier New" pitchFamily="34" charset="0"/>
-                <a:ea typeface="Courier New" pitchFamily="34" charset="-122"/>
-                <a:cs typeface="Courier New" pitchFamily="34" charset="-120"/>
-              </a:rPr>
-              <a:t>)</a:t>
-            </a:r>
-            <a:r>
-              <a:rPr lang="en-US" sz="1050" dirty="0">
-                <a:solidFill>
-                  <a:srgbClr val="CCCCCC"/>
-                </a:solidFill>
-                <a:latin typeface="Courier New" pitchFamily="34" charset="0"/>
-                <a:ea typeface="Courier New" pitchFamily="34" charset="-122"/>
-                <a:cs typeface="Courier New" pitchFamily="34" charset="-120"/>
-              </a:rPr>
-              <a:t>.</a:t>
-            </a:r>
-            <a:endParaRPr lang="en-US" sz="1050" dirty="0"/>
+            <a:endParaRPr lang="en-US" sz="950" dirty="0"/>
           </a:p>
           <a:p>
             <a:pPr indent="0" marL="0">
@@ -15294,28 +15149,105 @@
               <a:buNone/>
             </a:pPr>
             <a:r>
-              <a:rPr lang="en-US" sz="1050" dirty="0">
-                <a:solidFill>
-                  <a:srgbClr val="CCCCCC"/>
-                </a:solidFill>
-                <a:latin typeface="Courier New" pitchFamily="34" charset="0"/>
-                <a:ea typeface="Courier New" pitchFamily="34" charset="-122"/>
-                <a:cs typeface="Courier New" pitchFamily="34" charset="-120"/>
-              </a:rPr>
-              <a:t>                                       </a:t>
-            </a:r>
-            <a:r>
-              <a:rPr lang="en-US" sz="1050" i="1" dirty="0">
-                <a:solidFill>
-                  <a:srgbClr val="6A9955"/>
-                </a:solidFill>
-                <a:latin typeface="Courier New" pitchFamily="34" charset="0"/>
-                <a:ea typeface="Courier New" pitchFamily="34" charset="-122"/>
-                <a:cs typeface="Courier New" pitchFamily="34" charset="-120"/>
-              </a:rPr>
-              <a:t>" `11987654321`</a:t>
-            </a:r>
-            <a:endParaRPr lang="en-US" sz="1050" dirty="0"/>
+              <a:rPr lang="en-US" sz="950" dirty="0">
+                <a:solidFill>
+                  <a:srgbClr val="CCCCCC"/>
+                </a:solidFill>
+                <a:latin typeface="Courier New" pitchFamily="34" charset="0"/>
+                <a:ea typeface="Courier New" pitchFamily="34" charset="-122"/>
+                <a:cs typeface="Courier New" pitchFamily="34" charset="-120"/>
+              </a:rPr>
+              <a:t>                    </a:t>
+            </a:r>
+            <a:r>
+              <a:rPr lang="en-US" sz="950" dirty="0">
+                <a:solidFill>
+                  <a:srgbClr val="CCCCCC"/>
+                </a:solidFill>
+                <a:latin typeface="Courier New" pitchFamily="34" charset="0"/>
+                <a:ea typeface="Courier New" pitchFamily="34" charset="-122"/>
+                <a:cs typeface="Courier New" pitchFamily="34" charset="-120"/>
+              </a:rPr>
+              <a:t>occ</a:t>
+            </a:r>
+            <a:r>
+              <a:rPr lang="en-US" sz="950" dirty="0">
+                <a:solidFill>
+                  <a:srgbClr val="CCCCCC"/>
+                </a:solidFill>
+                <a:latin typeface="Courier New" pitchFamily="34" charset="0"/>
+                <a:ea typeface="Courier New" pitchFamily="34" charset="-122"/>
+                <a:cs typeface="Courier New" pitchFamily="34" charset="-120"/>
+              </a:rPr>
+              <a:t>  </a:t>
+            </a:r>
+            <a:r>
+              <a:rPr lang="en-US" sz="950" dirty="0">
+                <a:solidFill>
+                  <a:srgbClr val="CCCCCC"/>
+                </a:solidFill>
+                <a:latin typeface="Courier New" pitchFamily="34" charset="0"/>
+                <a:ea typeface="Courier New" pitchFamily="34" charset="-122"/>
+                <a:cs typeface="Courier New" pitchFamily="34" charset="-120"/>
+              </a:rPr>
+              <a:t>=</a:t>
+            </a:r>
+            <a:r>
+              <a:rPr lang="en-US" sz="950" dirty="0">
+                <a:solidFill>
+                  <a:srgbClr val="CCCCCC"/>
+                </a:solidFill>
+                <a:latin typeface="Courier New" pitchFamily="34" charset="0"/>
+                <a:ea typeface="Courier New" pitchFamily="34" charset="-122"/>
+                <a:cs typeface="Courier New" pitchFamily="34" charset="-120"/>
+              </a:rPr>
+              <a:t> </a:t>
+            </a:r>
+            <a:r>
+              <a:rPr lang="en-US" sz="950" dirty="0">
+                <a:solidFill>
+                  <a:srgbClr val="B5CEA8"/>
+                </a:solidFill>
+                <a:latin typeface="Courier New" pitchFamily="34" charset="0"/>
+                <a:ea typeface="Courier New" pitchFamily="34" charset="-122"/>
+                <a:cs typeface="Courier New" pitchFamily="34" charset="-120"/>
+              </a:rPr>
+              <a:t>0</a:t>
+            </a:r>
+            <a:r>
+              <a:rPr lang="en-US" sz="950" dirty="0">
+                <a:solidFill>
+                  <a:srgbClr val="CCCCCC"/>
+                </a:solidFill>
+                <a:latin typeface="Courier New" pitchFamily="34" charset="0"/>
+                <a:ea typeface="Courier New" pitchFamily="34" charset="-122"/>
+                <a:cs typeface="Courier New" pitchFamily="34" charset="-120"/>
+              </a:rPr>
+              <a:t> </a:t>
+            </a:r>
+            <a:r>
+              <a:rPr lang="en-US" sz="950" dirty="0">
+                <a:solidFill>
+                  <a:srgbClr val="CCCCCC"/>
+                </a:solidFill>
+                <a:latin typeface="Courier New" pitchFamily="34" charset="0"/>
+                <a:ea typeface="Courier New" pitchFamily="34" charset="-122"/>
+                <a:cs typeface="Courier New" pitchFamily="34" charset="-120"/>
+              </a:rPr>
+              <a:t>)</a:t>
+            </a:r>
+            <a:r>
+              <a:rPr lang="en-US" sz="950" dirty="0">
+                <a:solidFill>
+                  <a:srgbClr val="CCCCCC"/>
+                </a:solidFill>
+                <a:latin typeface="Courier New" pitchFamily="34" charset="0"/>
+                <a:ea typeface="Courier New" pitchFamily="34" charset="-122"/>
+                <a:cs typeface="Courier New" pitchFamily="34" charset="-120"/>
+              </a:rPr>
+              <a:t>.</a:t>
+            </a:r>
+            <a:endParaRPr lang="en-US" sz="950" dirty="0"/>
           </a:p>
           <a:p>
             <a:pPr indent="0" marL="0">
@@ -15325,7 +15257,7 @@
               <a:buNone/>
             </a:pPr>
             <a:r>
-              <a:rPr lang="en-US" sz="1050" dirty="0">
+              <a:rPr lang="en-US" sz="950" dirty="0">
                 <a:solidFill>
                   <a:srgbClr val="000000"/>
                 </a:solidFill>
@@ -15335,7 +15267,7 @@
               </a:rPr>
               <a:t> </a:t>
             </a:r>
-            <a:endParaRPr lang="en-US" sz="1050" dirty="0"/>
+            <a:endParaRPr lang="en-US" sz="950" dirty="0"/>
           </a:p>
           <a:p>
             <a:pPr indent="0" marL="0">
@@ -15345,171 +15277,17 @@
               <a:buNone/>
             </a:pPr>
             <a:r>
-              <a:rPr lang="en-US" sz="1050" dirty="0">
-                <a:solidFill>
-                  <a:srgbClr val="569CD6"/>
-                </a:solidFill>
-                <a:latin typeface="Courier New" pitchFamily="34" charset="0"/>
-                <a:ea typeface="Courier New" pitchFamily="34" charset="-122"/>
-                <a:cs typeface="Courier New" pitchFamily="34" charset="-120"/>
-              </a:rPr>
-              <a:t>DATA</a:t>
-            </a:r>
-            <a:r>
-              <a:rPr lang="en-US" sz="1050" dirty="0">
-                <a:solidFill>
-                  <a:srgbClr val="CCCCCC"/>
-                </a:solidFill>
-                <a:latin typeface="Courier New" pitchFamily="34" charset="0"/>
-                <a:ea typeface="Courier New" pitchFamily="34" charset="-122"/>
-                <a:cs typeface="Courier New" pitchFamily="34" charset="-120"/>
-              </a:rPr>
-              <a:t>(</a:t>
-            </a:r>
-            <a:r>
-              <a:rPr lang="en-US" sz="1050" dirty="0">
-                <a:solidFill>
-                  <a:srgbClr val="CCCCCC"/>
-                </a:solidFill>
-                <a:latin typeface="Courier New" pitchFamily="34" charset="0"/>
-                <a:ea typeface="Courier New" pitchFamily="34" charset="-122"/>
-                <a:cs typeface="Courier New" pitchFamily="34" charset="-120"/>
-              </a:rPr>
-              <a:t>first_number</a:t>
-            </a:r>
-            <a:r>
-              <a:rPr lang="en-US" sz="1050" dirty="0">
-                <a:solidFill>
-                  <a:srgbClr val="CCCCCC"/>
-                </a:solidFill>
-                <a:latin typeface="Courier New" pitchFamily="34" charset="0"/>
-                <a:ea typeface="Courier New" pitchFamily="34" charset="-122"/>
-                <a:cs typeface="Courier New" pitchFamily="34" charset="-120"/>
-              </a:rPr>
-              <a:t>)</a:t>
-            </a:r>
-            <a:r>
-              <a:rPr lang="en-US" sz="1050" dirty="0">
-                <a:solidFill>
-                  <a:srgbClr val="CCCCCC"/>
-                </a:solidFill>
-                <a:latin typeface="Courier New" pitchFamily="34" charset="0"/>
-                <a:ea typeface="Courier New" pitchFamily="34" charset="-122"/>
-                <a:cs typeface="Courier New" pitchFamily="34" charset="-120"/>
-              </a:rPr>
-              <a:t> </a:t>
-            </a:r>
-            <a:r>
-              <a:rPr lang="en-US" sz="1050" dirty="0">
-                <a:solidFill>
-                  <a:srgbClr val="CCCCCC"/>
-                </a:solidFill>
-                <a:latin typeface="Courier New" pitchFamily="34" charset="0"/>
-                <a:ea typeface="Courier New" pitchFamily="34" charset="-122"/>
-                <a:cs typeface="Courier New" pitchFamily="34" charset="-120"/>
-              </a:rPr>
-              <a:t>=</a:t>
-            </a:r>
-            <a:r>
-              <a:rPr lang="en-US" sz="1050" dirty="0">
-                <a:solidFill>
-                  <a:srgbClr val="CCCCCC"/>
-                </a:solidFill>
-                <a:latin typeface="Courier New" pitchFamily="34" charset="0"/>
-                <a:ea typeface="Courier New" pitchFamily="34" charset="-122"/>
-                <a:cs typeface="Courier New" pitchFamily="34" charset="-120"/>
-              </a:rPr>
-              <a:t> </a:t>
-            </a:r>
-            <a:r>
-              <a:rPr lang="en-US" sz="1050" dirty="0">
-                <a:solidFill>
-                  <a:srgbClr val="CCCCCC"/>
-                </a:solidFill>
-                <a:latin typeface="Courier New" pitchFamily="34" charset="0"/>
-                <a:ea typeface="Courier New" pitchFamily="34" charset="-122"/>
-                <a:cs typeface="Courier New" pitchFamily="34" charset="-120"/>
-              </a:rPr>
-              <a:t>find</a:t>
-            </a:r>
-            <a:r>
-              <a:rPr lang="en-US" sz="1050" dirty="0">
-                <a:solidFill>
-                  <a:srgbClr val="CCCCCC"/>
-                </a:solidFill>
-                <a:latin typeface="Courier New" pitchFamily="34" charset="0"/>
-                <a:ea typeface="Courier New" pitchFamily="34" charset="-122"/>
-                <a:cs typeface="Courier New" pitchFamily="34" charset="-120"/>
-              </a:rPr>
-              <a:t>(</a:t>
-            </a:r>
-            <a:r>
-              <a:rPr lang="en-US" sz="1050" dirty="0">
-                <a:solidFill>
-                  <a:srgbClr val="CCCCCC"/>
-                </a:solidFill>
-                <a:latin typeface="Courier New" pitchFamily="34" charset="0"/>
-                <a:ea typeface="Courier New" pitchFamily="34" charset="-122"/>
-                <a:cs typeface="Courier New" pitchFamily="34" charset="-120"/>
-              </a:rPr>
-              <a:t> </a:t>
-            </a:r>
-            <a:r>
-              <a:rPr lang="en-US" sz="1050" dirty="0">
-                <a:solidFill>
-                  <a:srgbClr val="CCCCCC"/>
-                </a:solidFill>
-                <a:latin typeface="Courier New" pitchFamily="34" charset="0"/>
-                <a:ea typeface="Courier New" pitchFamily="34" charset="-122"/>
-                <a:cs typeface="Courier New" pitchFamily="34" charset="-120"/>
-              </a:rPr>
-              <a:t>val</a:t>
-            </a:r>
-            <a:r>
-              <a:rPr lang="en-US" sz="1050" dirty="0">
-                <a:solidFill>
-                  <a:srgbClr val="CCCCCC"/>
-                </a:solidFill>
-                <a:latin typeface="Courier New" pitchFamily="34" charset="0"/>
-                <a:ea typeface="Courier New" pitchFamily="34" charset="-122"/>
-                <a:cs typeface="Courier New" pitchFamily="34" charset="-120"/>
-              </a:rPr>
-              <a:t> </a:t>
-            </a:r>
-            <a:r>
-              <a:rPr lang="en-US" sz="1050" dirty="0">
-                <a:solidFill>
-                  <a:srgbClr val="CCCCCC"/>
-                </a:solidFill>
-                <a:latin typeface="Courier New" pitchFamily="34" charset="0"/>
-                <a:ea typeface="Courier New" pitchFamily="34" charset="-122"/>
-                <a:cs typeface="Courier New" pitchFamily="34" charset="-120"/>
-              </a:rPr>
-              <a:t>=</a:t>
-            </a:r>
-            <a:r>
-              <a:rPr lang="en-US" sz="1050" dirty="0">
-                <a:solidFill>
-                  <a:srgbClr val="CCCCCC"/>
-                </a:solidFill>
-                <a:latin typeface="Courier New" pitchFamily="34" charset="0"/>
-                <a:ea typeface="Courier New" pitchFamily="34" charset="-122"/>
-                <a:cs typeface="Courier New" pitchFamily="34" charset="-120"/>
-              </a:rPr>
-              <a:t> </a:t>
-            </a:r>
-            <a:r>
-              <a:rPr lang="en-US" sz="1050" dirty="0">
-                <a:solidFill>
-                  <a:srgbClr val="CE9178"/>
-                </a:solidFill>
-                <a:latin typeface="Courier New" pitchFamily="34" charset="0"/>
-                <a:ea typeface="Courier New" pitchFamily="34" charset="-122"/>
-                <a:cs typeface="Courier New" pitchFamily="34" charset="-120"/>
-              </a:rPr>
-              <a:t>`Pedido 4500012345 aprovado`</a:t>
-            </a:r>
-            <a:endParaRPr lang="en-US" sz="1050" dirty="0"/>
+              <a:rPr lang="en-US" sz="950" i="1" dirty="0">
+                <a:solidFill>
+                  <a:srgbClr val="6A9955"/>
+                </a:solidFill>
+                <a:latin typeface="Courier New" pitchFamily="34" charset="0"/>
+                <a:ea typeface="Courier New" pitchFamily="34" charset="-122"/>
+                <a:cs typeface="Courier New" pitchFamily="34" charset="-120"/>
+              </a:rPr>
+              <a:t>" extrair_campo (ViaCEP): captura o valor de "uf" no JSON</a:t>
+            </a:r>
+            <a:endParaRPr lang="en-US" sz="950" dirty="0"/>
           </a:p>
           <a:p>
             <a:pPr indent="0" marL="0">
@@ -15519,29 +15297,18 @@
               <a:buNone/>
             </a:pPr>
             <a:r>
-              <a:rPr lang="en-US" sz="1050" dirty="0">
-                <a:solidFill>
-                  <a:srgbClr val="CCCCCC"/>
-                </a:solidFill>
-                <a:latin typeface="Courier New" pitchFamily="34" charset="0"/>
-                <a:ea typeface="Courier New" pitchFamily="34" charset="-122"/>
-                <a:cs typeface="Courier New" pitchFamily="34" charset="-120"/>
-              </a:rPr>
-              <a:t>                           </a:t>
-            </a:r>
-            <a:r>
-              <a:rPr lang="en-US" sz="1050" dirty="0">
-                <a:solidFill>
-                  <a:srgbClr val="CCCCCC"/>
-                </a:solidFill>
-                <a:latin typeface="Courier New" pitchFamily="34" charset="0"/>
-                <a:ea typeface="Courier New" pitchFamily="34" charset="-122"/>
-                <a:cs typeface="Courier New" pitchFamily="34" charset="-120"/>
-              </a:rPr>
-              <a:t>pcre</a:t>
-            </a:r>
-            <a:r>
-              <a:rPr lang="en-US" sz="1050" dirty="0">
+              <a:rPr lang="en-US" sz="950" dirty="0">
+                <a:solidFill>
+                  <a:srgbClr val="CCCCCC"/>
+                </a:solidFill>
+                <a:latin typeface="Courier New" pitchFamily="34" charset="0"/>
+                <a:ea typeface="Courier New" pitchFamily="34" charset="-122"/>
+                <a:cs typeface="Courier New" pitchFamily="34" charset="-120"/>
+              </a:rPr>
+              <a:t>FIND</a:t>
+            </a:r>
+            <a:r>
+              <a:rPr lang="en-US" sz="950" dirty="0">
                 <a:solidFill>
                   <a:srgbClr val="CCCCCC"/>
                 </a:solidFill>
@@ -15552,18 +15319,18 @@
               <a:t> </a:t>
             </a:r>
             <a:r>
-              <a:rPr lang="en-US" sz="1050" dirty="0">
-                <a:solidFill>
-                  <a:srgbClr val="CCCCCC"/>
-                </a:solidFill>
-                <a:latin typeface="Courier New" pitchFamily="34" charset="0"/>
-                <a:ea typeface="Courier New" pitchFamily="34" charset="-122"/>
-                <a:cs typeface="Courier New" pitchFamily="34" charset="-120"/>
-              </a:rPr>
-              <a:t>=</a:t>
-            </a:r>
-            <a:r>
-              <a:rPr lang="en-US" sz="1050" dirty="0">
+              <a:rPr lang="en-US" sz="950" dirty="0">
+                <a:solidFill>
+                  <a:srgbClr val="CCCCCC"/>
+                </a:solidFill>
+                <a:latin typeface="Courier New" pitchFamily="34" charset="0"/>
+                <a:ea typeface="Courier New" pitchFamily="34" charset="-122"/>
+                <a:cs typeface="Courier New" pitchFamily="34" charset="-120"/>
+              </a:rPr>
+              <a:t>PCRE</a:t>
+            </a:r>
+            <a:r>
+              <a:rPr lang="en-US" sz="950" dirty="0">
                 <a:solidFill>
                   <a:srgbClr val="CCCCCC"/>
                 </a:solidFill>
@@ -15574,7 +15341,7 @@
               <a:t> </a:t>
             </a:r>
             <a:r>
-              <a:rPr lang="en-US" sz="1050" dirty="0">
+              <a:rPr lang="en-US" sz="950" dirty="0">
                 <a:solidFill>
                   <a:srgbClr val="CE9178"/>
                 </a:solidFill>
@@ -15582,10 +15349,10 @@
                 <a:ea typeface="Courier New" pitchFamily="34" charset="-122"/>
                 <a:cs typeface="Courier New" pitchFamily="34" charset="-120"/>
               </a:rPr>
-              <a:t>`\d+`</a:t>
-            </a:r>
-            <a:r>
-              <a:rPr lang="en-US" sz="1050" dirty="0">
+              <a:t>`"uf"\s*:\s*"([^"]*)"`</a:t>
+            </a:r>
+            <a:r>
+              <a:rPr lang="en-US" sz="950" dirty="0">
                 <a:solidFill>
                   <a:srgbClr val="CCCCCC"/>
                 </a:solidFill>
@@ -15596,7 +15363,115 @@
               <a:t> </a:t>
             </a:r>
             <a:r>
-              <a:rPr lang="en-US" sz="1050" dirty="0">
+              <a:rPr lang="en-US" sz="950" dirty="0">
+                <a:solidFill>
+                  <a:srgbClr val="569CD6"/>
+                </a:solidFill>
+                <a:latin typeface="Courier New" pitchFamily="34" charset="0"/>
+                <a:ea typeface="Courier New" pitchFamily="34" charset="-122"/>
+                <a:cs typeface="Courier New" pitchFamily="34" charset="-120"/>
+              </a:rPr>
+              <a:t>IN</a:t>
+            </a:r>
+            <a:r>
+              <a:rPr lang="en-US" sz="950" dirty="0">
+                <a:solidFill>
+                  <a:srgbClr val="CCCCCC"/>
+                </a:solidFill>
+                <a:latin typeface="Courier New" pitchFamily="34" charset="0"/>
+                <a:ea typeface="Courier New" pitchFamily="34" charset="-122"/>
+                <a:cs typeface="Courier New" pitchFamily="34" charset="-120"/>
+              </a:rPr>
+              <a:t> </a:t>
+            </a:r>
+            <a:r>
+              <a:rPr lang="en-US" sz="950" dirty="0">
+                <a:solidFill>
+                  <a:srgbClr val="CCCCCC"/>
+                </a:solidFill>
+                <a:latin typeface="Courier New" pitchFamily="34" charset="0"/>
+                <a:ea typeface="Courier New" pitchFamily="34" charset="-122"/>
+                <a:cs typeface="Courier New" pitchFamily="34" charset="-120"/>
+              </a:rPr>
+              <a:t>lv_json</a:t>
+            </a:r>
+            <a:endParaRPr lang="en-US" sz="950" dirty="0"/>
+          </a:p>
+          <a:p>
+            <a:pPr indent="0" marL="0">
+              <a:lnSpc>
+                <a:spcPct val="105000"/>
+              </a:lnSpc>
+              <a:buNone/>
+            </a:pPr>
+            <a:r>
+              <a:rPr lang="en-US" sz="950" dirty="0">
+                <a:solidFill>
+                  <a:srgbClr val="CCCCCC"/>
+                </a:solidFill>
+                <a:latin typeface="Courier New" pitchFamily="34" charset="0"/>
+                <a:ea typeface="Courier New" pitchFamily="34" charset="-122"/>
+                <a:cs typeface="Courier New" pitchFamily="34" charset="-120"/>
+              </a:rPr>
+              <a:t>  </a:t>
+            </a:r>
+            <a:r>
+              <a:rPr lang="en-US" sz="950" dirty="0">
+                <a:solidFill>
+                  <a:srgbClr val="CCCCCC"/>
+                </a:solidFill>
+                <a:latin typeface="Courier New" pitchFamily="34" charset="0"/>
+                <a:ea typeface="Courier New" pitchFamily="34" charset="-122"/>
+                <a:cs typeface="Courier New" pitchFamily="34" charset="-120"/>
+              </a:rPr>
+              <a:t>SUBMATCHES</a:t>
+            </a:r>
+            <a:r>
+              <a:rPr lang="en-US" sz="950" dirty="0">
+                <a:solidFill>
+                  <a:srgbClr val="CCCCCC"/>
+                </a:solidFill>
+                <a:latin typeface="Courier New" pitchFamily="34" charset="0"/>
+                <a:ea typeface="Courier New" pitchFamily="34" charset="-122"/>
+                <a:cs typeface="Courier New" pitchFamily="34" charset="-120"/>
+              </a:rPr>
+              <a:t> </a:t>
+            </a:r>
+            <a:r>
+              <a:rPr lang="en-US" sz="950" dirty="0">
+                <a:solidFill>
+                  <a:srgbClr val="569CD6"/>
+                </a:solidFill>
+                <a:latin typeface="Courier New" pitchFamily="34" charset="0"/>
+                <a:ea typeface="Courier New" pitchFamily="34" charset="-122"/>
+                <a:cs typeface="Courier New" pitchFamily="34" charset="-120"/>
+              </a:rPr>
+              <a:t>DATA</a:t>
+            </a:r>
+            <a:r>
+              <a:rPr lang="en-US" sz="950" dirty="0">
+                <a:solidFill>
+                  <a:srgbClr val="CCCCCC"/>
+                </a:solidFill>
+                <a:latin typeface="Courier New" pitchFamily="34" charset="0"/>
+                <a:ea typeface="Courier New" pitchFamily="34" charset="-122"/>
+                <a:cs typeface="Courier New" pitchFamily="34" charset="-120"/>
+              </a:rPr>
+              <a:t>(</a:t>
+            </a:r>
+            <a:r>
+              <a:rPr lang="en-US" sz="950" dirty="0">
+                <a:solidFill>
+                  <a:srgbClr val="CCCCCC"/>
+                </a:solidFill>
+                <a:latin typeface="Courier New" pitchFamily="34" charset="0"/>
+                <a:ea typeface="Courier New" pitchFamily="34" charset="-122"/>
+                <a:cs typeface="Courier New" pitchFamily="34" charset="-120"/>
+              </a:rPr>
+              <a:t>lv_uf</a:t>
+            </a:r>
+            <a:r>
+              <a:rPr lang="en-US" sz="950" dirty="0">
                 <a:solidFill>
                   <a:srgbClr val="CCCCCC"/>
                 </a:solidFill>
@@ -15607,7 +15482,7 @@
               <a:t>)</a:t>
             </a:r>
             <a:r>
-              <a:rPr lang="en-US" sz="1050" dirty="0">
+              <a:rPr lang="en-US" sz="950" dirty="0">
                 <a:solidFill>
                   <a:srgbClr val="CCCCCC"/>
                 </a:solidFill>
@@ -15617,7 +15492,7 @@
               </a:rPr>
               <a:t>.</a:t>
             </a:r>
-            <a:endParaRPr lang="en-US" sz="1050" dirty="0"/>
+            <a:endParaRPr lang="en-US" sz="950" dirty="0"/>
           </a:p>
         </p:txBody>
       </p:sp>
@@ -15777,7 +15652,26 @@
                   <a:srgbClr val="556B82"/>
                 </a:solidFill>
               </a:rPr>
-              <a:t> segue o padrão: ideal para validar entradas.</a:t>
+              <a:t> segue o padrão: é assim que </a:t>
+            </a:r>
+            <a:r>
+              <a:rPr lang="en-US" sz="1050" dirty="0">
+                <a:solidFill>
+                  <a:srgbClr val="0064D9"/>
+                </a:solidFill>
+                <a:latin typeface="Courier New" pitchFamily="34" charset="0"/>
+                <a:ea typeface="Courier New" pitchFamily="34" charset="-122"/>
+                <a:cs typeface="Courier New" pitchFamily="34" charset="-120"/>
+              </a:rPr>
+              <a:t>validar_email</a:t>
+            </a:r>
+            <a:r>
+              <a:rPr lang="en-US" sz="1050" dirty="0">
+                <a:solidFill>
+                  <a:srgbClr val="556B82"/>
+                </a:solidFill>
+              </a:rPr>
+              <a:t> aceita um e-mail.</a:t>
             </a:r>
             <a:endParaRPr lang="en-US" sz="1400" dirty="0"/>
           </a:p>
@@ -15889,7 +15783,7 @@
                   <a:srgbClr val="556B82"/>
                 </a:solidFill>
               </a:rPr>
-              <a:t>Troca todas as ocorrências: aqui, remove tudo que não é dígito.</a:t>
+              <a:t>Troca todas as ocorrências: limpa CPF, CEP, telefone e cartão.</a:t>
             </a:r>
             <a:endParaRPr lang="en-US" sz="1400" dirty="0"/>
           </a:p>
@@ -15987,7 +15881,7 @@
                 <a:ea typeface="Courier New" pitchFamily="34" charset="-122"/>
                 <a:cs typeface="Courier New" pitchFamily="34" charset="-120"/>
               </a:rPr>
-              <a:t>find( pcre = )</a:t>
+              <a:t>FIND PCRE … SUBMATCHES</a:t>
             </a:r>
             <a:endParaRPr lang="en-US" sz="1400" dirty="0"/>
           </a:p>
@@ -16001,7 +15895,7 @@
                   <a:srgbClr val="556B82"/>
                 </a:solidFill>
               </a:rPr>
-              <a:t>Posição da primeira ocorrência do padrão.</a:t>
+              <a:t>Devolve o grupo entre parênteses: a classe do ViaCEP lê cada campo do JSON assim.</a:t>
             </a:r>
             <a:endParaRPr lang="en-US" sz="1400" dirty="0"/>
           </a:p>
@@ -16113,7 +16007,7 @@
                 <a:ea typeface="Courier New" pitchFamily="34" charset="-122"/>
                 <a:cs typeface="Courier New" pitchFamily="34" charset="-120"/>
               </a:rPr>
-              <a:t>\d</a:t>
+              <a:t>[^0-9]</a:t>
             </a:r>
             <a:r>
               <a:rPr lang="en-US" sz="1050" dirty="0">
@@ -16121,7 +16015,7 @@
                   <a:srgbClr val="556B82"/>
                 </a:solidFill>
               </a:rPr>
-              <a:t> dígito, </a:t>
+              <a:t> não dígito, </a:t>
             </a:r>
             <a:r>
               <a:rPr lang="en-US" sz="1050" dirty="0">
@@ -16132,7 +16026,7 @@
                 <a:ea typeface="Courier New" pitchFamily="34" charset="-122"/>
                 <a:cs typeface="Courier New" pitchFamily="34" charset="-120"/>
               </a:rPr>
-              <a:t>\w</a:t>
+              <a:t>\s*</a:t>
             </a:r>
             <a:r>
               <a:rPr lang="en-US" sz="1050" dirty="0">
@@ -16140,7 +16034,7 @@
                   <a:srgbClr val="556B82"/>
                 </a:solidFill>
               </a:rPr>
-              <a:t> letra ou dígito, </a:t>
+              <a:t> espaços opcionais, </a:t>
             </a:r>
             <a:r>
               <a:rPr lang="en-US" sz="1050" dirty="0">
@@ -16151,7 +16045,7 @@
                 <a:ea typeface="Courier New" pitchFamily="34" charset="-122"/>
                 <a:cs typeface="Courier New" pitchFamily="34" charset="-120"/>
               </a:rPr>
-              <a:t>\D</a:t>
+              <a:t>{2,}</a:t>
             </a:r>
             <a:r>
               <a:rPr lang="en-US" sz="1050" dirty="0">
@@ -16159,7 +16053,7 @@
                   <a:srgbClr val="556B82"/>
                 </a:solidFill>
               </a:rPr>
-              <a:t> não dígito.</a:t>
+              <a:t> duas ou mais vezes.</a:t>
             </a:r>
             <a:endParaRPr lang="en-US" sz="1400" dirty="0"/>
           </a:p>
@@ -16415,7 +16309,7 @@
                   <a:srgbClr val="89D1FF"/>
                 </a:solidFill>
               </a:rPr>
-              <a:t>AULA 04.03 · SEÇÃO 3</a:t>
+              <a:t>AULA 02.03 · SEÇÃO 3</a:t>
             </a:r>
             <a:endParaRPr lang="en-US" sz="1300" dirty="0"/>
           </a:p>
